--- a/docs/presentation/parking_chatbot.pptx
+++ b/docs/presentation/parking_chatbot.pptx
@@ -5,20 +5,22 @@
     <p:sldMasterId id="2147483648" r:id="rId1"/>
   </p:sldMasterIdLst>
   <p:sldIdLst>
-    <p:sldId id="256" r:id="rId2"/>
-    <p:sldId id="257" r:id="rId3"/>
-    <p:sldId id="258" r:id="rId4"/>
-    <p:sldId id="259" r:id="rId5"/>
-    <p:sldId id="260" r:id="rId6"/>
-    <p:sldId id="261" r:id="rId7"/>
-    <p:sldId id="262" r:id="rId8"/>
-    <p:sldId id="263" r:id="rId9"/>
-    <p:sldId id="264" r:id="rId10"/>
-    <p:sldId id="265" r:id="rId11"/>
-    <p:sldId id="266" r:id="rId12"/>
-    <p:sldId id="267" r:id="rId13"/>
+    <p:sldId id="256" r:id="rId7"/>
+    <p:sldId id="257" r:id="rId8"/>
+    <p:sldId id="258" r:id="rId9"/>
+    <p:sldId id="259" r:id="rId10"/>
+    <p:sldId id="260" r:id="rId11"/>
+    <p:sldId id="261" r:id="rId12"/>
+    <p:sldId id="262" r:id="rId13"/>
+    <p:sldId id="263" r:id="rId14"/>
+    <p:sldId id="264" r:id="rId15"/>
+    <p:sldId id="265" r:id="rId16"/>
+    <p:sldId id="266" r:id="rId17"/>
+    <p:sldId id="267" r:id="rId18"/>
+    <p:sldId id="268" r:id="rId19"/>
+    <p:sldId id="269" r:id="rId20"/>
   </p:sldIdLst>
-  <p:sldSz cx="12188825" cy="6858000"/>
+  <p:sldSz cx="12188952" cy="6858000" type="screen4x3"/>
   <p:notesSz cx="6858000" cy="9144000"/>
   <p:defaultTextStyle>
     <a:defPPr>
@@ -115,22 +117,6 @@
       </a:defRPr>
     </a:lvl9pPr>
   </p:defaultTextStyle>
-  <p:extLst>
-    <p:ext uri="{EFAFB233-063F-42B5-8137-9DF3F51BA10A}">
-      <p15:sldGuideLst xmlns:p15="http://schemas.microsoft.com/office/powerpoint/2012/main">
-        <p15:guide id="1" orient="horz" pos="2160">
-          <p15:clr>
-            <a:srgbClr val="A4A3A4"/>
-          </p15:clr>
-        </p15:guide>
-        <p15:guide id="2" pos="2880">
-          <p15:clr>
-            <a:srgbClr val="A4A3A4"/>
-          </p15:clr>
-        </p15:guide>
-      </p15:sldGuideLst>
-    </p:ext>
-  </p:extLst>
 </p:presentation>
 </file>
 
@@ -172,9 +158,10 @@
           <a:lstStyle/>
           <a:p>
             <a:r>
-              <a:rPr lang="en-US"/>
+              <a:rPr lang="en-US" smtClean="0"/>
               <a:t>Click to edit Master title style</a:t>
             </a:r>
+            <a:endParaRPr lang="en-US"/>
           </a:p>
         </p:txBody>
       </p:sp>
@@ -290,9 +277,10 @@
           </a:lstStyle>
           <a:p>
             <a:r>
-              <a:rPr lang="en-US"/>
+              <a:rPr lang="en-US" smtClean="0"/>
               <a:t>Click to edit Master subtitle style</a:t>
             </a:r>
+            <a:endParaRPr lang="en-US"/>
           </a:p>
         </p:txBody>
       </p:sp>
@@ -313,7 +301,7 @@
           <a:p>
             <a:fld id="{5BCAD085-E8A6-8845-BD4E-CB4CCA059FC4}" type="datetimeFigureOut">
               <a:rPr lang="en-US" smtClean="0"/>
-              <a:t>8/11/26</a:t>
+              <a:t>1/27/13</a:t>
             </a:fld>
             <a:endParaRPr lang="en-US"/>
           </a:p>
@@ -407,9 +395,10 @@
           <a:lstStyle/>
           <a:p>
             <a:r>
-              <a:rPr lang="en-US"/>
+              <a:rPr lang="en-US" smtClean="0"/>
               <a:t>Click to edit Master title style</a:t>
             </a:r>
+            <a:endParaRPr lang="en-US"/>
           </a:p>
         </p:txBody>
       </p:sp>
@@ -430,37 +419,38 @@
           <a:p>
             <a:pPr lvl="0"/>
             <a:r>
-              <a:rPr lang="en-US"/>
+              <a:rPr lang="en-US" smtClean="0"/>
               <a:t>Click to edit Master text styles</a:t>
             </a:r>
           </a:p>
           <a:p>
             <a:pPr lvl="1"/>
             <a:r>
-              <a:rPr lang="en-US"/>
+              <a:rPr lang="en-US" smtClean="0"/>
               <a:t>Second level</a:t>
             </a:r>
           </a:p>
           <a:p>
             <a:pPr lvl="2"/>
             <a:r>
-              <a:rPr lang="en-US"/>
+              <a:rPr lang="en-US" smtClean="0"/>
               <a:t>Third level</a:t>
             </a:r>
           </a:p>
           <a:p>
             <a:pPr lvl="3"/>
             <a:r>
-              <a:rPr lang="en-US"/>
+              <a:rPr lang="en-US" smtClean="0"/>
               <a:t>Fourth level</a:t>
             </a:r>
           </a:p>
           <a:p>
             <a:pPr lvl="4"/>
             <a:r>
-              <a:rPr lang="en-US"/>
+              <a:rPr lang="en-US" smtClean="0"/>
               <a:t>Fifth level</a:t>
             </a:r>
+            <a:endParaRPr lang="en-US"/>
           </a:p>
         </p:txBody>
       </p:sp>
@@ -481,7 +471,7 @@
           <a:p>
             <a:fld id="{5BCAD085-E8A6-8845-BD4E-CB4CCA059FC4}" type="datetimeFigureOut">
               <a:rPr lang="en-US" smtClean="0"/>
-              <a:t>8/11/26</a:t>
+              <a:t>1/27/13</a:t>
             </a:fld>
             <a:endParaRPr lang="en-US"/>
           </a:p>
@@ -580,9 +570,10 @@
           <a:lstStyle/>
           <a:p>
             <a:r>
-              <a:rPr lang="en-US"/>
+              <a:rPr lang="en-US" smtClean="0"/>
               <a:t>Click to edit Master title style</a:t>
             </a:r>
+            <a:endParaRPr lang="en-US"/>
           </a:p>
         </p:txBody>
       </p:sp>
@@ -608,37 +599,38 @@
           <a:p>
             <a:pPr lvl="0"/>
             <a:r>
-              <a:rPr lang="en-US"/>
+              <a:rPr lang="en-US" smtClean="0"/>
               <a:t>Click to edit Master text styles</a:t>
             </a:r>
           </a:p>
           <a:p>
             <a:pPr lvl="1"/>
             <a:r>
-              <a:rPr lang="en-US"/>
+              <a:rPr lang="en-US" smtClean="0"/>
               <a:t>Second level</a:t>
             </a:r>
           </a:p>
           <a:p>
             <a:pPr lvl="2"/>
             <a:r>
-              <a:rPr lang="en-US"/>
+              <a:rPr lang="en-US" smtClean="0"/>
               <a:t>Third level</a:t>
             </a:r>
           </a:p>
           <a:p>
             <a:pPr lvl="3"/>
             <a:r>
-              <a:rPr lang="en-US"/>
+              <a:rPr lang="en-US" smtClean="0"/>
               <a:t>Fourth level</a:t>
             </a:r>
           </a:p>
           <a:p>
             <a:pPr lvl="4"/>
             <a:r>
-              <a:rPr lang="en-US"/>
+              <a:rPr lang="en-US" smtClean="0"/>
               <a:t>Fifth level</a:t>
             </a:r>
+            <a:endParaRPr lang="en-US"/>
           </a:p>
         </p:txBody>
       </p:sp>
@@ -659,7 +651,7 @@
           <a:p>
             <a:fld id="{5BCAD085-E8A6-8845-BD4E-CB4CCA059FC4}" type="datetimeFigureOut">
               <a:rPr lang="en-US" smtClean="0"/>
-              <a:t>8/11/26</a:t>
+              <a:t>1/27/13</a:t>
             </a:fld>
             <a:endParaRPr lang="en-US"/>
           </a:p>
@@ -753,9 +745,10 @@
           <a:lstStyle/>
           <a:p>
             <a:r>
-              <a:rPr lang="en-US"/>
+              <a:rPr lang="en-US" smtClean="0"/>
               <a:t>Click to edit Master title style</a:t>
             </a:r>
+            <a:endParaRPr lang="en-US"/>
           </a:p>
         </p:txBody>
       </p:sp>
@@ -776,37 +769,38 @@
           <a:p>
             <a:pPr lvl="0"/>
             <a:r>
-              <a:rPr lang="en-US"/>
+              <a:rPr lang="en-US" smtClean="0"/>
               <a:t>Click to edit Master text styles</a:t>
             </a:r>
           </a:p>
           <a:p>
             <a:pPr lvl="1"/>
             <a:r>
-              <a:rPr lang="en-US"/>
+              <a:rPr lang="en-US" smtClean="0"/>
               <a:t>Second level</a:t>
             </a:r>
           </a:p>
           <a:p>
             <a:pPr lvl="2"/>
             <a:r>
-              <a:rPr lang="en-US"/>
+              <a:rPr lang="en-US" smtClean="0"/>
               <a:t>Third level</a:t>
             </a:r>
           </a:p>
           <a:p>
             <a:pPr lvl="3"/>
             <a:r>
-              <a:rPr lang="en-US"/>
+              <a:rPr lang="en-US" smtClean="0"/>
               <a:t>Fourth level</a:t>
             </a:r>
           </a:p>
           <a:p>
             <a:pPr lvl="4"/>
             <a:r>
-              <a:rPr lang="en-US"/>
+              <a:rPr lang="en-US" smtClean="0"/>
               <a:t>Fifth level</a:t>
             </a:r>
+            <a:endParaRPr lang="en-US"/>
           </a:p>
         </p:txBody>
       </p:sp>
@@ -827,7 +821,7 @@
           <a:p>
             <a:fld id="{5BCAD085-E8A6-8845-BD4E-CB4CCA059FC4}" type="datetimeFigureOut">
               <a:rPr lang="en-US" smtClean="0"/>
-              <a:t>8/11/26</a:t>
+              <a:t>1/27/13</a:t>
             </a:fld>
             <a:endParaRPr lang="en-US"/>
           </a:p>
@@ -930,9 +924,10 @@
           </a:lstStyle>
           <a:p>
             <a:r>
-              <a:rPr lang="en-US"/>
+              <a:rPr lang="en-US" smtClean="0"/>
               <a:t>Click to edit Master title style</a:t>
             </a:r>
+            <a:endParaRPr lang="en-US"/>
           </a:p>
         </p:txBody>
       </p:sp>
@@ -1049,7 +1044,7 @@
           <a:p>
             <a:pPr lvl="0"/>
             <a:r>
-              <a:rPr lang="en-US"/>
+              <a:rPr lang="en-US" smtClean="0"/>
               <a:t>Click to edit Master text styles</a:t>
             </a:r>
           </a:p>
@@ -1072,7 +1067,7 @@
           <a:p>
             <a:fld id="{5BCAD085-E8A6-8845-BD4E-CB4CCA059FC4}" type="datetimeFigureOut">
               <a:rPr lang="en-US" smtClean="0"/>
-              <a:t>8/11/26</a:t>
+              <a:t>1/27/13</a:t>
             </a:fld>
             <a:endParaRPr lang="en-US"/>
           </a:p>
@@ -1166,9 +1161,10 @@
           <a:lstStyle/>
           <a:p>
             <a:r>
-              <a:rPr lang="en-US"/>
+              <a:rPr lang="en-US" smtClean="0"/>
               <a:t>Click to edit Master title style</a:t>
             </a:r>
+            <a:endParaRPr lang="en-US"/>
           </a:p>
         </p:txBody>
       </p:sp>
@@ -1222,37 +1218,38 @@
           <a:p>
             <a:pPr lvl="0"/>
             <a:r>
-              <a:rPr lang="en-US"/>
+              <a:rPr lang="en-US" smtClean="0"/>
               <a:t>Click to edit Master text styles</a:t>
             </a:r>
           </a:p>
           <a:p>
             <a:pPr lvl="1"/>
             <a:r>
-              <a:rPr lang="en-US"/>
+              <a:rPr lang="en-US" smtClean="0"/>
               <a:t>Second level</a:t>
             </a:r>
           </a:p>
           <a:p>
             <a:pPr lvl="2"/>
             <a:r>
-              <a:rPr lang="en-US"/>
+              <a:rPr lang="en-US" smtClean="0"/>
               <a:t>Third level</a:t>
             </a:r>
           </a:p>
           <a:p>
             <a:pPr lvl="3"/>
             <a:r>
-              <a:rPr lang="en-US"/>
+              <a:rPr lang="en-US" smtClean="0"/>
               <a:t>Fourth level</a:t>
             </a:r>
           </a:p>
           <a:p>
             <a:pPr lvl="4"/>
             <a:r>
-              <a:rPr lang="en-US"/>
+              <a:rPr lang="en-US" smtClean="0"/>
               <a:t>Fifth level</a:t>
             </a:r>
+            <a:endParaRPr lang="en-US"/>
           </a:p>
         </p:txBody>
       </p:sp>
@@ -1306,37 +1303,38 @@
           <a:p>
             <a:pPr lvl="0"/>
             <a:r>
-              <a:rPr lang="en-US"/>
+              <a:rPr lang="en-US" smtClean="0"/>
               <a:t>Click to edit Master text styles</a:t>
             </a:r>
           </a:p>
           <a:p>
             <a:pPr lvl="1"/>
             <a:r>
-              <a:rPr lang="en-US"/>
+              <a:rPr lang="en-US" smtClean="0"/>
               <a:t>Second level</a:t>
             </a:r>
           </a:p>
           <a:p>
             <a:pPr lvl="2"/>
             <a:r>
-              <a:rPr lang="en-US"/>
+              <a:rPr lang="en-US" smtClean="0"/>
               <a:t>Third level</a:t>
             </a:r>
           </a:p>
           <a:p>
             <a:pPr lvl="3"/>
             <a:r>
-              <a:rPr lang="en-US"/>
+              <a:rPr lang="en-US" smtClean="0"/>
               <a:t>Fourth level</a:t>
             </a:r>
           </a:p>
           <a:p>
             <a:pPr lvl="4"/>
             <a:r>
-              <a:rPr lang="en-US"/>
+              <a:rPr lang="en-US" smtClean="0"/>
               <a:t>Fifth level</a:t>
             </a:r>
+            <a:endParaRPr lang="en-US"/>
           </a:p>
         </p:txBody>
       </p:sp>
@@ -1357,7 +1355,7 @@
           <a:p>
             <a:fld id="{5BCAD085-E8A6-8845-BD4E-CB4CCA059FC4}" type="datetimeFigureOut">
               <a:rPr lang="en-US" smtClean="0"/>
-              <a:t>8/11/26</a:t>
+              <a:t>1/27/13</a:t>
             </a:fld>
             <a:endParaRPr lang="en-US"/>
           </a:p>
@@ -1455,9 +1453,10 @@
           </a:lstStyle>
           <a:p>
             <a:r>
-              <a:rPr lang="en-US"/>
+              <a:rPr lang="en-US" smtClean="0"/>
               <a:t>Click to edit Master title style</a:t>
             </a:r>
+            <a:endParaRPr lang="en-US"/>
           </a:p>
         </p:txBody>
       </p:sp>
@@ -1520,7 +1519,7 @@
           <a:p>
             <a:pPr lvl="0"/>
             <a:r>
-              <a:rPr lang="en-US"/>
+              <a:rPr lang="en-US" smtClean="0"/>
               <a:t>Click to edit Master text styles</a:t>
             </a:r>
           </a:p>
@@ -1576,37 +1575,38 @@
           <a:p>
             <a:pPr lvl="0"/>
             <a:r>
-              <a:rPr lang="en-US"/>
+              <a:rPr lang="en-US" smtClean="0"/>
               <a:t>Click to edit Master text styles</a:t>
             </a:r>
           </a:p>
           <a:p>
             <a:pPr lvl="1"/>
             <a:r>
-              <a:rPr lang="en-US"/>
+              <a:rPr lang="en-US" smtClean="0"/>
               <a:t>Second level</a:t>
             </a:r>
           </a:p>
           <a:p>
             <a:pPr lvl="2"/>
             <a:r>
-              <a:rPr lang="en-US"/>
+              <a:rPr lang="en-US" smtClean="0"/>
               <a:t>Third level</a:t>
             </a:r>
           </a:p>
           <a:p>
             <a:pPr lvl="3"/>
             <a:r>
-              <a:rPr lang="en-US"/>
+              <a:rPr lang="en-US" smtClean="0"/>
               <a:t>Fourth level</a:t>
             </a:r>
           </a:p>
           <a:p>
             <a:pPr lvl="4"/>
             <a:r>
-              <a:rPr lang="en-US"/>
+              <a:rPr lang="en-US" smtClean="0"/>
               <a:t>Fifth level</a:t>
             </a:r>
+            <a:endParaRPr lang="en-US"/>
           </a:p>
         </p:txBody>
       </p:sp>
@@ -1669,7 +1669,7 @@
           <a:p>
             <a:pPr lvl="0"/>
             <a:r>
-              <a:rPr lang="en-US"/>
+              <a:rPr lang="en-US" smtClean="0"/>
               <a:t>Click to edit Master text styles</a:t>
             </a:r>
           </a:p>
@@ -1725,37 +1725,38 @@
           <a:p>
             <a:pPr lvl="0"/>
             <a:r>
-              <a:rPr lang="en-US"/>
+              <a:rPr lang="en-US" smtClean="0"/>
               <a:t>Click to edit Master text styles</a:t>
             </a:r>
           </a:p>
           <a:p>
             <a:pPr lvl="1"/>
             <a:r>
-              <a:rPr lang="en-US"/>
+              <a:rPr lang="en-US" smtClean="0"/>
               <a:t>Second level</a:t>
             </a:r>
           </a:p>
           <a:p>
             <a:pPr lvl="2"/>
             <a:r>
-              <a:rPr lang="en-US"/>
+              <a:rPr lang="en-US" smtClean="0"/>
               <a:t>Third level</a:t>
             </a:r>
           </a:p>
           <a:p>
             <a:pPr lvl="3"/>
             <a:r>
-              <a:rPr lang="en-US"/>
+              <a:rPr lang="en-US" smtClean="0"/>
               <a:t>Fourth level</a:t>
             </a:r>
           </a:p>
           <a:p>
             <a:pPr lvl="4"/>
             <a:r>
-              <a:rPr lang="en-US"/>
+              <a:rPr lang="en-US" smtClean="0"/>
               <a:t>Fifth level</a:t>
             </a:r>
+            <a:endParaRPr lang="en-US"/>
           </a:p>
         </p:txBody>
       </p:sp>
@@ -1776,7 +1777,7 @@
           <a:p>
             <a:fld id="{5BCAD085-E8A6-8845-BD4E-CB4CCA059FC4}" type="datetimeFigureOut">
               <a:rPr lang="en-US" smtClean="0"/>
-              <a:t>8/11/26</a:t>
+              <a:t>1/27/13</a:t>
             </a:fld>
             <a:endParaRPr lang="en-US"/>
           </a:p>
@@ -1870,9 +1871,10 @@
           <a:lstStyle/>
           <a:p>
             <a:r>
-              <a:rPr lang="en-US"/>
+              <a:rPr lang="en-US" smtClean="0"/>
               <a:t>Click to edit Master title style</a:t>
             </a:r>
+            <a:endParaRPr lang="en-US"/>
           </a:p>
         </p:txBody>
       </p:sp>
@@ -1893,7 +1895,7 @@
           <a:p>
             <a:fld id="{5BCAD085-E8A6-8845-BD4E-CB4CCA059FC4}" type="datetimeFigureOut">
               <a:rPr lang="en-US" smtClean="0"/>
-              <a:t>8/11/26</a:t>
+              <a:t>1/27/13</a:t>
             </a:fld>
             <a:endParaRPr lang="en-US"/>
           </a:p>
@@ -1988,7 +1990,7 @@
           <a:p>
             <a:fld id="{5BCAD085-E8A6-8845-BD4E-CB4CCA059FC4}" type="datetimeFigureOut">
               <a:rPr lang="en-US" smtClean="0"/>
-              <a:t>8/11/26</a:t>
+              <a:t>1/27/13</a:t>
             </a:fld>
             <a:endParaRPr lang="en-US"/>
           </a:p>
@@ -2091,9 +2093,10 @@
           </a:lstStyle>
           <a:p>
             <a:r>
-              <a:rPr lang="en-US"/>
+              <a:rPr lang="en-US" smtClean="0"/>
               <a:t>Click to edit Master title style</a:t>
             </a:r>
+            <a:endParaRPr lang="en-US"/>
           </a:p>
         </p:txBody>
       </p:sp>
@@ -2147,37 +2150,38 @@
           <a:p>
             <a:pPr lvl="0"/>
             <a:r>
-              <a:rPr lang="en-US"/>
+              <a:rPr lang="en-US" smtClean="0"/>
               <a:t>Click to edit Master text styles</a:t>
             </a:r>
           </a:p>
           <a:p>
             <a:pPr lvl="1"/>
             <a:r>
-              <a:rPr lang="en-US"/>
+              <a:rPr lang="en-US" smtClean="0"/>
               <a:t>Second level</a:t>
             </a:r>
           </a:p>
           <a:p>
             <a:pPr lvl="2"/>
             <a:r>
-              <a:rPr lang="en-US"/>
+              <a:rPr lang="en-US" smtClean="0"/>
               <a:t>Third level</a:t>
             </a:r>
           </a:p>
           <a:p>
             <a:pPr lvl="3"/>
             <a:r>
-              <a:rPr lang="en-US"/>
+              <a:rPr lang="en-US" smtClean="0"/>
               <a:t>Fourth level</a:t>
             </a:r>
           </a:p>
           <a:p>
             <a:pPr lvl="4"/>
             <a:r>
-              <a:rPr lang="en-US"/>
+              <a:rPr lang="en-US" smtClean="0"/>
               <a:t>Fifth level</a:t>
             </a:r>
+            <a:endParaRPr lang="en-US"/>
           </a:p>
         </p:txBody>
       </p:sp>
@@ -2240,7 +2244,7 @@
           <a:p>
             <a:pPr lvl="0"/>
             <a:r>
-              <a:rPr lang="en-US"/>
+              <a:rPr lang="en-US" smtClean="0"/>
               <a:t>Click to edit Master text styles</a:t>
             </a:r>
           </a:p>
@@ -2263,7 +2267,7 @@
           <a:p>
             <a:fld id="{5BCAD085-E8A6-8845-BD4E-CB4CCA059FC4}" type="datetimeFigureOut">
               <a:rPr lang="en-US" smtClean="0"/>
-              <a:t>8/11/26</a:t>
+              <a:t>1/27/13</a:t>
             </a:fld>
             <a:endParaRPr lang="en-US"/>
           </a:p>
@@ -2366,9 +2370,10 @@
           </a:lstStyle>
           <a:p>
             <a:r>
-              <a:rPr lang="en-US"/>
+              <a:rPr lang="en-US" smtClean="0"/>
               <a:t>Click to edit Master title style</a:t>
             </a:r>
+            <a:endParaRPr lang="en-US"/>
           </a:p>
         </p:txBody>
       </p:sp>
@@ -2492,7 +2497,7 @@
           <a:p>
             <a:pPr lvl="0"/>
             <a:r>
-              <a:rPr lang="en-US"/>
+              <a:rPr lang="en-US" smtClean="0"/>
               <a:t>Click to edit Master text styles</a:t>
             </a:r>
           </a:p>
@@ -2515,7 +2520,7 @@
           <a:p>
             <a:fld id="{5BCAD085-E8A6-8845-BD4E-CB4CCA059FC4}" type="datetimeFigureOut">
               <a:rPr lang="en-US" smtClean="0"/>
-              <a:t>8/11/26</a:t>
+              <a:t>1/27/13</a:t>
             </a:fld>
             <a:endParaRPr lang="en-US"/>
           </a:p>
@@ -2624,9 +2629,10 @@
           <a:lstStyle/>
           <a:p>
             <a:r>
-              <a:rPr lang="en-US"/>
+              <a:rPr lang="en-US" smtClean="0"/>
               <a:t>Click to edit Master title style</a:t>
             </a:r>
+            <a:endParaRPr lang="en-US"/>
           </a:p>
         </p:txBody>
       </p:sp>
@@ -2657,37 +2663,38 @@
           <a:p>
             <a:pPr lvl="0"/>
             <a:r>
-              <a:rPr lang="en-US"/>
+              <a:rPr lang="en-US" smtClean="0"/>
               <a:t>Click to edit Master text styles</a:t>
             </a:r>
           </a:p>
           <a:p>
             <a:pPr lvl="1"/>
             <a:r>
-              <a:rPr lang="en-US"/>
+              <a:rPr lang="en-US" smtClean="0"/>
               <a:t>Second level</a:t>
             </a:r>
           </a:p>
           <a:p>
             <a:pPr lvl="2"/>
             <a:r>
-              <a:rPr lang="en-US"/>
+              <a:rPr lang="en-US" smtClean="0"/>
               <a:t>Third level</a:t>
             </a:r>
           </a:p>
           <a:p>
             <a:pPr lvl="3"/>
             <a:r>
-              <a:rPr lang="en-US"/>
+              <a:rPr lang="en-US" smtClean="0"/>
               <a:t>Fourth level</a:t>
             </a:r>
           </a:p>
           <a:p>
             <a:pPr lvl="4"/>
             <a:r>
-              <a:rPr lang="en-US"/>
+              <a:rPr lang="en-US" smtClean="0"/>
               <a:t>Fifth level</a:t>
             </a:r>
+            <a:endParaRPr lang="en-US"/>
           </a:p>
         </p:txBody>
       </p:sp>
@@ -2726,7 +2733,7 @@
           <a:p>
             <a:fld id="{5BCAD085-E8A6-8845-BD4E-CB4CCA059FC4}" type="datetimeFigureOut">
               <a:rPr lang="en-US" smtClean="0"/>
-              <a:t>8/11/26</a:t>
+              <a:t>1/27/13</a:t>
             </a:fld>
             <a:endParaRPr lang="en-US"/>
           </a:p>
@@ -3085,7 +3092,7 @@
 </file>
 
 <file path=ppt/slides/slide1.xml><?xml version="1.0" encoding="utf-8"?>
-<p:sld xmlns:a="http://schemas.openxmlformats.org/drawingml/2006/main" xmlns:r="http://schemas.openxmlformats.org/officeDocument/2006/relationships" xmlns:p="http://schemas.openxmlformats.org/presentationml/2006/main">
+<p:sld xmlns:a="http://schemas.openxmlformats.org/drawingml/2006/main" xmlns:p="http://schemas.openxmlformats.org/presentationml/2006/main" xmlns:r="http://schemas.openxmlformats.org/officeDocument/2006/relationships">
   <p:cSld>
     <p:spTree>
       <p:nvGrpSpPr>
@@ -3093,14 +3100,7 @@
         <p:cNvGrpSpPr/>
         <p:nvPr/>
       </p:nvGrpSpPr>
-      <p:grpSpPr>
-        <a:xfrm>
-          <a:off x="0" y="0"/>
-          <a:ext cx="0" cy="0"/>
-          <a:chOff x="0" y="0"/>
-          <a:chExt cx="0" cy="0"/>
-        </a:xfrm>
-      </p:grpSpPr>
+      <p:grpSpPr/>
       <p:sp>
         <p:nvSpPr>
           <p:cNvPr id="2" name="Rectangle 1"/>
@@ -3141,7 +3141,6 @@
           <a:lstStyle/>
           <a:p>
             <a:pPr algn="ctr"/>
-            <a:endParaRPr/>
           </a:p>
         </p:txBody>
       </p:sp>
@@ -3185,7 +3184,6 @@
           <a:lstStyle/>
           <a:p>
             <a:pPr algn="ctr"/>
-            <a:endParaRPr/>
           </a:p>
         </p:txBody>
       </p:sp>
@@ -3286,7 +3284,7 @@
                   <a:srgbClr val="B0C8E0"/>
                 </a:solidFill>
               </a:rPr>
-              <a:t>Stage 1 — RAG Foundation</a:t>
+              <a:t>Stages 1–3 — RAG Foundation · Reservation · Human-in-the-Loop Approval</a:t>
             </a:r>
           </a:p>
         </p:txBody>
@@ -3320,7 +3318,7 @@
                   <a:srgbClr val="FFFFFF"/>
                 </a:solidFill>
               </a:rPr>
-              <a:t>Solution Overview  ·  Architecture  ·  RAG Pipeline  ·  Guard Rails  ·  Reservation  ·  Evaluation</a:t>
+              <a:t>Overview  ·  Architecture  ·  RAG  ·  Guard Rails  ·  Reservation  ·  HITL Approval  ·  Evaluation</a:t>
             </a:r>
           </a:p>
         </p:txBody>
@@ -3402,7 +3400,7 @@
 </file>
 
 <file path=ppt/slides/slide10.xml><?xml version="1.0" encoding="utf-8"?>
-<p:sld xmlns:a="http://schemas.openxmlformats.org/drawingml/2006/main" xmlns:r="http://schemas.openxmlformats.org/officeDocument/2006/relationships" xmlns:p="http://schemas.openxmlformats.org/presentationml/2006/main">
+<p:sld xmlns:a="http://schemas.openxmlformats.org/drawingml/2006/main" xmlns:p="http://schemas.openxmlformats.org/presentationml/2006/main" xmlns:r="http://schemas.openxmlformats.org/officeDocument/2006/relationships">
   <p:cSld>
     <p:spTree>
       <p:nvGrpSpPr>
@@ -3410,14 +3408,7 @@
         <p:cNvGrpSpPr/>
         <p:nvPr/>
       </p:nvGrpSpPr>
-      <p:grpSpPr>
-        <a:xfrm>
-          <a:off x="0" y="0"/>
-          <a:ext cx="0" cy="0"/>
-          <a:chOff x="0" y="0"/>
-          <a:chExt cx="0" cy="0"/>
-        </a:xfrm>
-      </p:grpSpPr>
+      <p:grpSpPr/>
       <p:sp>
         <p:nvSpPr>
           <p:cNvPr id="2" name="Rectangle 1"/>
@@ -3458,7 +3449,6 @@
           <a:lstStyle/>
           <a:p>
             <a:pPr algn="ctr"/>
-            <a:endParaRPr/>
           </a:p>
         </p:txBody>
       </p:sp>
@@ -3502,7 +3492,6 @@
           <a:lstStyle/>
           <a:p>
             <a:pPr algn="ctr"/>
-            <a:endParaRPr/>
           </a:p>
         </p:txBody>
       </p:sp>
@@ -3614,7 +3603,6 @@
           <a:lstStyle/>
           <a:p>
             <a:pPr algn="ctr"/>
-            <a:endParaRPr/>
           </a:p>
         </p:txBody>
       </p:sp>
@@ -3658,7 +3646,6 @@
           <a:lstStyle/>
           <a:p>
             <a:pPr algn="ctr"/>
-            <a:endParaRPr/>
           </a:p>
         </p:txBody>
       </p:sp>
@@ -3804,7 +3791,6 @@
           <a:lstStyle/>
           <a:p>
             <a:pPr algn="ctr"/>
-            <a:endParaRPr/>
           </a:p>
         </p:txBody>
       </p:sp>
@@ -3848,7 +3834,6 @@
           <a:lstStyle/>
           <a:p>
             <a:pPr algn="ctr"/>
-            <a:endParaRPr/>
           </a:p>
         </p:txBody>
       </p:sp>
@@ -3994,7 +3979,6 @@
           <a:lstStyle/>
           <a:p>
             <a:pPr algn="ctr"/>
-            <a:endParaRPr/>
           </a:p>
         </p:txBody>
       </p:sp>
@@ -4038,7 +4022,6 @@
           <a:lstStyle/>
           <a:p>
             <a:pPr algn="ctr"/>
-            <a:endParaRPr/>
           </a:p>
         </p:txBody>
       </p:sp>
@@ -4184,7 +4167,6 @@
           <a:lstStyle/>
           <a:p>
             <a:pPr algn="ctr"/>
-            <a:endParaRPr/>
           </a:p>
         </p:txBody>
       </p:sp>
@@ -4228,7 +4210,6 @@
           <a:lstStyle/>
           <a:p>
             <a:pPr algn="ctr"/>
-            <a:endParaRPr/>
           </a:p>
         </p:txBody>
       </p:sp>
@@ -4374,7 +4355,6 @@
           <a:lstStyle/>
           <a:p>
             <a:pPr algn="ctr"/>
-            <a:endParaRPr/>
           </a:p>
         </p:txBody>
       </p:sp>
@@ -4418,7 +4398,6 @@
           <a:lstStyle/>
           <a:p>
             <a:pPr algn="ctr"/>
-            <a:endParaRPr/>
           </a:p>
         </p:txBody>
       </p:sp>
@@ -4564,7 +4543,6 @@
           <a:lstStyle/>
           <a:p>
             <a:pPr algn="ctr"/>
-            <a:endParaRPr/>
           </a:p>
         </p:txBody>
       </p:sp>
@@ -4608,7 +4586,6 @@
           <a:lstStyle/>
           <a:p>
             <a:pPr algn="ctr"/>
-            <a:endParaRPr/>
           </a:p>
         </p:txBody>
       </p:sp>
@@ -4723,7 +4700,7 @@
 </file>
 
 <file path=ppt/slides/slide11.xml><?xml version="1.0" encoding="utf-8"?>
-<p:sld xmlns:a="http://schemas.openxmlformats.org/drawingml/2006/main" xmlns:r="http://schemas.openxmlformats.org/officeDocument/2006/relationships" xmlns:p="http://schemas.openxmlformats.org/presentationml/2006/main">
+<p:sld xmlns:a="http://schemas.openxmlformats.org/drawingml/2006/main" xmlns:p="http://schemas.openxmlformats.org/presentationml/2006/main" xmlns:r="http://schemas.openxmlformats.org/officeDocument/2006/relationships">
   <p:cSld>
     <p:spTree>
       <p:nvGrpSpPr>
@@ -4731,14 +4708,7 @@
         <p:cNvGrpSpPr/>
         <p:nvPr/>
       </p:nvGrpSpPr>
-      <p:grpSpPr>
-        <a:xfrm>
-          <a:off x="0" y="0"/>
-          <a:ext cx="0" cy="0"/>
-          <a:chOff x="0" y="0"/>
-          <a:chExt cx="0" cy="0"/>
-        </a:xfrm>
-      </p:grpSpPr>
+      <p:grpSpPr/>
       <p:sp>
         <p:nvSpPr>
           <p:cNvPr id="2" name="Rectangle 1"/>
@@ -4779,7 +4749,6 @@
           <a:lstStyle/>
           <a:p>
             <a:pPr algn="ctr"/>
-            <a:endParaRPr/>
           </a:p>
         </p:txBody>
       </p:sp>
@@ -4823,7 +4792,6 @@
           <a:lstStyle/>
           <a:p>
             <a:pPr algn="ctr"/>
-            <a:endParaRPr/>
           </a:p>
         </p:txBody>
       </p:sp>
@@ -4935,7 +4903,6 @@
           <a:lstStyle/>
           <a:p>
             <a:pPr algn="ctr"/>
-            <a:endParaRPr/>
           </a:p>
         </p:txBody>
       </p:sp>
@@ -5081,7 +5048,6 @@
           <a:lstStyle/>
           <a:p>
             <a:pPr algn="ctr"/>
-            <a:endParaRPr/>
           </a:p>
         </p:txBody>
       </p:sp>
@@ -5227,7 +5193,6 @@
           <a:lstStyle/>
           <a:p>
             <a:pPr algn="ctr"/>
-            <a:endParaRPr/>
           </a:p>
         </p:txBody>
       </p:sp>
@@ -5373,7 +5338,6 @@
           <a:lstStyle/>
           <a:p>
             <a:pPr algn="ctr"/>
-            <a:endParaRPr/>
           </a:p>
         </p:txBody>
       </p:sp>
@@ -5519,7 +5483,6 @@
           <a:lstStyle/>
           <a:p>
             <a:pPr algn="ctr"/>
-            <a:endParaRPr/>
           </a:p>
         </p:txBody>
       </p:sp>
@@ -5665,7 +5628,6 @@
           <a:lstStyle/>
           <a:p>
             <a:pPr algn="ctr"/>
-            <a:endParaRPr/>
           </a:p>
         </p:txBody>
       </p:sp>
@@ -5811,7 +5773,6 @@
           <a:lstStyle/>
           <a:p>
             <a:pPr algn="ctr"/>
-            <a:endParaRPr/>
           </a:p>
         </p:txBody>
       </p:sp>
@@ -5957,7 +5918,6 @@
           <a:lstStyle/>
           <a:p>
             <a:pPr algn="ctr"/>
-            <a:endParaRPr/>
           </a:p>
         </p:txBody>
       </p:sp>
@@ -6035,7 +5995,6 @@
           <a:lstStyle/>
           <a:p>
             <a:pPr algn="ctr"/>
-            <a:endParaRPr/>
           </a:p>
         </p:txBody>
       </p:sp>
@@ -6072,14 +6031,6 @@
             </a:r>
           </a:p>
           <a:p>
-            <a:endParaRPr sz="1000">
-              <a:solidFill>
-                <a:srgbClr val="ABB2BF"/>
-              </a:solidFill>
-              <a:latin typeface="Courier New"/>
-            </a:endParaRPr>
-          </a:p>
-          <a:p>
             <a:r>
               <a:rPr sz="1000">
                 <a:solidFill>
@@ -6087,6 +6038,17 @@
                 </a:solidFill>
                 <a:latin typeface="Courier New"/>
               </a:rPr>
+              <a:t/>
+            </a:r>
+          </a:p>
+          <a:p>
+            <a:r>
+              <a:rPr sz="1000">
+                <a:solidFill>
+                  <a:srgbClr val="ABB2BF"/>
+                </a:solidFill>
+                <a:latin typeface="Courier New"/>
+              </a:rPr>
               <a:t>jobs:</a:t>
             </a:r>
           </a:p>
@@ -6124,14 +6086,6 @@
             </a:r>
           </a:p>
           <a:p>
-            <a:endParaRPr sz="1000">
-              <a:solidFill>
-                <a:srgbClr val="ABB2BF"/>
-              </a:solidFill>
-              <a:latin typeface="Courier New"/>
-            </a:endParaRPr>
-          </a:p>
-          <a:p>
             <a:r>
               <a:rPr sz="1000">
                 <a:solidFill>
@@ -6139,6 +6093,17 @@
                 </a:solidFill>
                 <a:latin typeface="Courier New"/>
               </a:rPr>
+              <a:t/>
+            </a:r>
+          </a:p>
+          <a:p>
+            <a:r>
+              <a:rPr sz="1000">
+                <a:solidFill>
+                  <a:srgbClr val="ABB2BF"/>
+                </a:solidFill>
+                <a:latin typeface="Courier New"/>
+              </a:rPr>
               <a:t>  test:</a:t>
             </a:r>
           </a:p>
@@ -6176,12 +6141,15 @@
             </a:r>
           </a:p>
           <a:p>
-            <a:endParaRPr sz="1000">
-              <a:solidFill>
-                <a:srgbClr val="ABB2BF"/>
-              </a:solidFill>
-              <a:latin typeface="Courier New"/>
-            </a:endParaRPr>
+            <a:r>
+              <a:rPr sz="1000">
+                <a:solidFill>
+                  <a:srgbClr val="ABB2BF"/>
+                </a:solidFill>
+                <a:latin typeface="Courier New"/>
+              </a:rPr>
+              <a:t/>
+            </a:r>
           </a:p>
           <a:p>
             <a:r>
@@ -6236,7 +6204,6 @@
           <a:lstStyle/>
           <a:p>
             <a:pPr algn="ctr"/>
-            <a:endParaRPr/>
           </a:p>
         </p:txBody>
       </p:sp>
@@ -6317,7 +6284,7 @@
 </file>
 
 <file path=ppt/slides/slide12.xml><?xml version="1.0" encoding="utf-8"?>
-<p:sld xmlns:a="http://schemas.openxmlformats.org/drawingml/2006/main" xmlns:r="http://schemas.openxmlformats.org/officeDocument/2006/relationships" xmlns:p="http://schemas.openxmlformats.org/presentationml/2006/main">
+<p:sld xmlns:a="http://schemas.openxmlformats.org/drawingml/2006/main" xmlns:p="http://schemas.openxmlformats.org/presentationml/2006/main" xmlns:r="http://schemas.openxmlformats.org/officeDocument/2006/relationships">
   <p:cSld>
     <p:spTree>
       <p:nvGrpSpPr>
@@ -6325,14 +6292,7 @@
         <p:cNvGrpSpPr/>
         <p:nvPr/>
       </p:nvGrpSpPr>
-      <p:grpSpPr>
-        <a:xfrm>
-          <a:off x="0" y="0"/>
-          <a:ext cx="0" cy="0"/>
-          <a:chOff x="0" y="0"/>
-          <a:chExt cx="0" cy="0"/>
-        </a:xfrm>
-      </p:grpSpPr>
+      <p:grpSpPr/>
       <p:sp>
         <p:nvSpPr>
           <p:cNvPr id="2" name="Rectangle 1"/>
@@ -6373,7 +6333,6 @@
           <a:lstStyle/>
           <a:p>
             <a:pPr algn="ctr"/>
-            <a:endParaRPr/>
           </a:p>
         </p:txBody>
       </p:sp>
@@ -6417,7 +6376,6 @@
           <a:lstStyle/>
           <a:p>
             <a:pPr algn="ctr"/>
-            <a:endParaRPr/>
           </a:p>
         </p:txBody>
       </p:sp>
@@ -6450,7 +6408,7 @@
                   <a:srgbClr val="FFFFFF"/>
                 </a:solidFill>
               </a:rPr>
-              <a:t>What's Next — Stage 2 Roadmap</a:t>
+              <a:t>Stage 3 — Human-in-the-Loop Approval</a:t>
             </a:r>
           </a:p>
         </p:txBody>
@@ -6484,7 +6442,7 @@
                   <a:srgbClr val="B0C8E0"/>
                 </a:solidFill>
               </a:rPr>
-              <a:t>Known gaps and planned improvements</a:t>
+              <a:t>Admin email notification + approve/reject API</a:t>
             </a:r>
           </a:p>
         </p:txBody>
@@ -6498,7 +6456,7 @@
         <p:spPr>
           <a:xfrm>
             <a:off x="274320" y="1417320"/>
-            <a:ext cx="3657600" cy="4572000"/>
+            <a:ext cx="11612880" cy="1280160"/>
           </a:xfrm>
           <a:prstGeom prst="rect">
             <a:avLst/>
@@ -6529,20 +6487,1521 @@
           <a:lstStyle/>
           <a:p>
             <a:pPr algn="ctr"/>
-            <a:endParaRPr/>
-          </a:p>
-        </p:txBody>
-      </p:sp>
-      <p:sp>
-        <p:nvSpPr>
-          <p:cNvPr id="7" name="Rectangle 6"/>
+          </a:p>
+        </p:txBody>
+      </p:sp>
+      <p:sp>
+        <p:nvSpPr>
+          <p:cNvPr id="7" name="TextBox 6"/>
+          <p:cNvSpPr txBox="1"/>
+          <p:nvPr/>
+        </p:nvSpPr>
+        <p:spPr>
+          <a:xfrm>
+            <a:off x="411480" y="1463040"/>
+            <a:ext cx="11338560" cy="1188720"/>
+          </a:xfrm>
+          <a:prstGeom prst="rect">
+            <a:avLst/>
+          </a:prstGeom>
+          <a:noFill/>
+        </p:spPr>
+        <p:txBody>
+          <a:bodyPr wrap="square">
+            <a:spAutoFit/>
+          </a:bodyPr>
+          <a:lstStyle/>
+          <a:p>
+            <a:pPr>
+              <a:spcBef>
+                <a:spcPts val="300"/>
+              </a:spcBef>
+            </a:pPr>
+            <a:r>
+              <a:rPr sz="1300">
+                <a:solidFill>
+                  <a:srgbClr val="444444"/>
+                </a:solidFill>
+              </a:rPr>
+              <a:t>• When reservation validated: approval_request_node sends SMTP email to admin with reservation details and curl commands</a:t>
+            </a:r>
+          </a:p>
+          <a:p>
+            <a:pPr>
+              <a:spcBef>
+                <a:spcPts val="300"/>
+              </a:spcBef>
+            </a:pPr>
+            <a:r>
+              <a:rPr sz="1300">
+                <a:solidFill>
+                  <a:srgbClr val="444444"/>
+                </a:solidFill>
+              </a:rPr>
+              <a:t>• Status transitions: draft → submitted → pending_approval → approved | rejected | expired</a:t>
+            </a:r>
+          </a:p>
+          <a:p>
+            <a:pPr>
+              <a:spcBef>
+                <a:spcPts val="300"/>
+              </a:spcBef>
+            </a:pPr>
+            <a:r>
+              <a:rPr sz="1300">
+                <a:solidFill>
+                  <a:srgbClr val="444444"/>
+                </a:solidFill>
+              </a:rPr>
+              <a:t>• pending_check_node fires first on every user message — polls in-process PendingStore for admin decision</a:t>
+            </a:r>
+          </a:p>
+          <a:p>
+            <a:pPr>
+              <a:spcBef>
+                <a:spcPts val="300"/>
+              </a:spcBef>
+            </a:pPr>
+            <a:r>
+              <a:rPr sz="1300">
+                <a:solidFill>
+                  <a:srgbClr val="444444"/>
+                </a:solidFill>
+              </a:rPr>
+              <a:t>• Free interaction continues while reservation is pending: LangGraph routes to normal flow if no decision yet</a:t>
+            </a:r>
+          </a:p>
+        </p:txBody>
+      </p:sp>
+      <p:sp>
+        <p:nvSpPr>
+          <p:cNvPr id="8" name="Rectangle 7"/>
           <p:cNvSpPr/>
           <p:nvPr/>
         </p:nvSpPr>
         <p:spPr>
           <a:xfrm>
-            <a:off x="274320" y="1417320"/>
-            <a:ext cx="3657600" cy="411480"/>
+            <a:off x="274320" y="2926080"/>
+            <a:ext cx="1097280" cy="457200"/>
+          </a:xfrm>
+          <a:prstGeom prst="rect">
+            <a:avLst/>
+          </a:prstGeom>
+          <a:solidFill>
+            <a:srgbClr val="444444"/>
+          </a:solidFill>
+          <a:ln>
+            <a:noFill/>
+          </a:ln>
+        </p:spPr>
+        <p:style>
+          <a:lnRef idx="1">
+            <a:schemeClr val="accent1"/>
+          </a:lnRef>
+          <a:fillRef idx="3">
+            <a:schemeClr val="accent1"/>
+          </a:fillRef>
+          <a:effectRef idx="2">
+            <a:schemeClr val="accent1"/>
+          </a:effectRef>
+          <a:fontRef idx="minor">
+            <a:schemeClr val="lt1"/>
+          </a:fontRef>
+        </p:style>
+        <p:txBody>
+          <a:bodyPr rtlCol="0" anchor="ctr"/>
+          <a:lstStyle/>
+          <a:p>
+            <a:pPr algn="ctr"/>
+          </a:p>
+        </p:txBody>
+      </p:sp>
+      <p:sp>
+        <p:nvSpPr>
+          <p:cNvPr id="9" name="TextBox 8"/>
+          <p:cNvSpPr txBox="1"/>
+          <p:nvPr/>
+        </p:nvSpPr>
+        <p:spPr>
+          <a:xfrm>
+            <a:off x="274320" y="2971800"/>
+            <a:ext cx="1097280" cy="365760"/>
+          </a:xfrm>
+          <a:prstGeom prst="rect">
+            <a:avLst/>
+          </a:prstGeom>
+          <a:noFill/>
+        </p:spPr>
+        <p:txBody>
+          <a:bodyPr wrap="square">
+            <a:spAutoFit/>
+          </a:bodyPr>
+          <a:lstStyle/>
+          <a:p>
+            <a:pPr algn="ctr"/>
+            <a:r>
+              <a:rPr sz="1100" b="1">
+                <a:solidFill>
+                  <a:srgbClr val="FFFFFF"/>
+                </a:solidFill>
+              </a:rPr>
+              <a:t>START</a:t>
+            </a:r>
+          </a:p>
+        </p:txBody>
+      </p:sp>
+      <p:cxnSp>
+        <p:nvCxnSpPr>
+          <p:cNvPr id="10" name="Connector 9"/>
+          <p:cNvCxnSpPr/>
+          <p:nvPr/>
+        </p:nvCxnSpPr>
+        <p:spPr>
+          <a:xfrm>
+            <a:off x="1371600" y="3154680"/>
+            <a:ext cx="228600" cy="0"/>
+          </a:xfrm>
+          <a:prstGeom prst="line">
+            <a:avLst/>
+          </a:prstGeom>
+          <a:ln w="19050">
+            <a:solidFill>
+              <a:srgbClr val="444444"/>
+            </a:solidFill>
+          </a:ln>
+        </p:spPr>
+        <p:style>
+          <a:lnRef idx="2">
+            <a:schemeClr val="accent1"/>
+          </a:lnRef>
+          <a:fillRef idx="0">
+            <a:schemeClr val="accent1"/>
+          </a:fillRef>
+          <a:effectRef idx="1">
+            <a:schemeClr val="accent1"/>
+          </a:effectRef>
+          <a:fontRef idx="minor">
+            <a:schemeClr val="tx1"/>
+          </a:fontRef>
+        </p:style>
+      </p:cxnSp>
+      <p:sp>
+        <p:nvSpPr>
+          <p:cNvPr id="11" name="Rectangle 10"/>
+          <p:cNvSpPr/>
+          <p:nvPr/>
+        </p:nvSpPr>
+        <p:spPr>
+          <a:xfrm>
+            <a:off x="1600200" y="2926080"/>
+            <a:ext cx="1737360" cy="457200"/>
+          </a:xfrm>
+          <a:prstGeom prst="rect">
+            <a:avLst/>
+          </a:prstGeom>
+          <a:solidFill>
+            <a:srgbClr val="F57C00"/>
+          </a:solidFill>
+          <a:ln>
+            <a:noFill/>
+          </a:ln>
+        </p:spPr>
+        <p:style>
+          <a:lnRef idx="1">
+            <a:schemeClr val="accent1"/>
+          </a:lnRef>
+          <a:fillRef idx="3">
+            <a:schemeClr val="accent1"/>
+          </a:fillRef>
+          <a:effectRef idx="2">
+            <a:schemeClr val="accent1"/>
+          </a:effectRef>
+          <a:fontRef idx="minor">
+            <a:schemeClr val="lt1"/>
+          </a:fontRef>
+        </p:style>
+        <p:txBody>
+          <a:bodyPr rtlCol="0" anchor="ctr"/>
+          <a:lstStyle/>
+          <a:p>
+            <a:pPr algn="ctr"/>
+          </a:p>
+        </p:txBody>
+      </p:sp>
+      <p:sp>
+        <p:nvSpPr>
+          <p:cNvPr id="12" name="TextBox 11"/>
+          <p:cNvSpPr txBox="1"/>
+          <p:nvPr/>
+        </p:nvSpPr>
+        <p:spPr>
+          <a:xfrm>
+            <a:off x="1600200" y="2971800"/>
+            <a:ext cx="1737360" cy="365760"/>
+          </a:xfrm>
+          <a:prstGeom prst="rect">
+            <a:avLst/>
+          </a:prstGeom>
+          <a:noFill/>
+        </p:spPr>
+        <p:txBody>
+          <a:bodyPr wrap="square">
+            <a:spAutoFit/>
+          </a:bodyPr>
+          <a:lstStyle/>
+          <a:p>
+            <a:pPr algn="ctr"/>
+            <a:r>
+              <a:rPr sz="1100" b="1">
+                <a:solidFill>
+                  <a:srgbClr val="FFFFFF"/>
+                </a:solidFill>
+              </a:rPr>
+              <a:t>pending_check
+_node</a:t>
+            </a:r>
+          </a:p>
+        </p:txBody>
+      </p:sp>
+      <p:cxnSp>
+        <p:nvCxnSpPr>
+          <p:cNvPr id="13" name="Connector 12"/>
+          <p:cNvCxnSpPr/>
+          <p:nvPr/>
+        </p:nvCxnSpPr>
+        <p:spPr>
+          <a:xfrm>
+            <a:off x="3337560" y="3154680"/>
+            <a:ext cx="228600" cy="0"/>
+          </a:xfrm>
+          <a:prstGeom prst="line">
+            <a:avLst/>
+          </a:prstGeom>
+          <a:ln w="19050">
+            <a:solidFill>
+              <a:srgbClr val="444444"/>
+            </a:solidFill>
+          </a:ln>
+        </p:spPr>
+        <p:style>
+          <a:lnRef idx="2">
+            <a:schemeClr val="accent1"/>
+          </a:lnRef>
+          <a:fillRef idx="0">
+            <a:schemeClr val="accent1"/>
+          </a:fillRef>
+          <a:effectRef idx="1">
+            <a:schemeClr val="accent1"/>
+          </a:effectRef>
+          <a:fontRef idx="minor">
+            <a:schemeClr val="tx1"/>
+          </a:fontRef>
+        </p:style>
+      </p:cxnSp>
+      <p:sp>
+        <p:nvSpPr>
+          <p:cNvPr id="14" name="TextBox 13"/>
+          <p:cNvSpPr txBox="1"/>
+          <p:nvPr/>
+        </p:nvSpPr>
+        <p:spPr>
+          <a:xfrm>
+            <a:off x="3383280" y="2880360"/>
+            <a:ext cx="914400" cy="274320"/>
+          </a:xfrm>
+          <a:prstGeom prst="rect">
+            <a:avLst/>
+          </a:prstGeom>
+          <a:noFill/>
+        </p:spPr>
+        <p:txBody>
+          <a:bodyPr wrap="square">
+            <a:spAutoFit/>
+          </a:bodyPr>
+          <a:lstStyle/>
+          <a:p>
+            <a:pPr algn="l"/>
+            <a:r>
+              <a:rPr sz="900" b="1">
+                <a:solidFill>
+                  <a:srgbClr val="F57C00"/>
+                </a:solidFill>
+              </a:rPr>
+              <a:t>pending?</a:t>
+            </a:r>
+          </a:p>
+        </p:txBody>
+      </p:sp>
+      <p:sp>
+        <p:nvSpPr>
+          <p:cNvPr id="15" name="Rectangle 14"/>
+          <p:cNvSpPr/>
+          <p:nvPr/>
+        </p:nvSpPr>
+        <p:spPr>
+          <a:xfrm>
+            <a:off x="4343400" y="2926080"/>
+            <a:ext cx="1920240" cy="457200"/>
+          </a:xfrm>
+          <a:prstGeom prst="rect">
+            <a:avLst/>
+          </a:prstGeom>
+          <a:solidFill>
+            <a:srgbClr val="007A87"/>
+          </a:solidFill>
+          <a:ln>
+            <a:noFill/>
+          </a:ln>
+        </p:spPr>
+        <p:style>
+          <a:lnRef idx="1">
+            <a:schemeClr val="accent1"/>
+          </a:lnRef>
+          <a:fillRef idx="3">
+            <a:schemeClr val="accent1"/>
+          </a:fillRef>
+          <a:effectRef idx="2">
+            <a:schemeClr val="accent1"/>
+          </a:effectRef>
+          <a:fontRef idx="minor">
+            <a:schemeClr val="lt1"/>
+          </a:fontRef>
+        </p:style>
+        <p:txBody>
+          <a:bodyPr rtlCol="0" anchor="ctr"/>
+          <a:lstStyle/>
+          <a:p>
+            <a:pPr algn="ctr"/>
+          </a:p>
+        </p:txBody>
+      </p:sp>
+      <p:sp>
+        <p:nvSpPr>
+          <p:cNvPr id="16" name="TextBox 15"/>
+          <p:cNvSpPr txBox="1"/>
+          <p:nvPr/>
+        </p:nvSpPr>
+        <p:spPr>
+          <a:xfrm>
+            <a:off x="4343400" y="2971800"/>
+            <a:ext cx="1920240" cy="365760"/>
+          </a:xfrm>
+          <a:prstGeom prst="rect">
+            <a:avLst/>
+          </a:prstGeom>
+          <a:noFill/>
+        </p:spPr>
+        <p:txBody>
+          <a:bodyPr wrap="square">
+            <a:spAutoFit/>
+          </a:bodyPr>
+          <a:lstStyle/>
+          <a:p>
+            <a:pPr algn="ctr"/>
+            <a:r>
+              <a:rPr sz="1100" b="1">
+                <a:solidFill>
+                  <a:srgbClr val="FFFFFF"/>
+                </a:solidFill>
+              </a:rPr>
+              <a:t>route_intent
+(normal flow)</a:t>
+            </a:r>
+          </a:p>
+        </p:txBody>
+      </p:sp>
+      <p:sp>
+        <p:nvSpPr>
+          <p:cNvPr id="17" name="TextBox 16"/>
+          <p:cNvSpPr txBox="1"/>
+          <p:nvPr/>
+        </p:nvSpPr>
+        <p:spPr>
+          <a:xfrm>
+            <a:off x="1691640" y="3456432"/>
+            <a:ext cx="1737360" cy="256032"/>
+          </a:xfrm>
+          <a:prstGeom prst="rect">
+            <a:avLst/>
+          </a:prstGeom>
+          <a:noFill/>
+        </p:spPr>
+        <p:txBody>
+          <a:bodyPr wrap="square">
+            <a:spAutoFit/>
+          </a:bodyPr>
+          <a:lstStyle/>
+          <a:p>
+            <a:pPr algn="l"/>
+            <a:r>
+              <a:rPr sz="900" b="0">
+                <a:solidFill>
+                  <a:srgbClr val="C62828"/>
+                </a:solidFill>
+              </a:rPr>
+              <a:t>decision/expired ↓</a:t>
+            </a:r>
+          </a:p>
+        </p:txBody>
+      </p:sp>
+      <p:sp>
+        <p:nvSpPr>
+          <p:cNvPr id="18" name="Rectangle 17"/>
+          <p:cNvSpPr/>
+          <p:nvPr/>
+        </p:nvSpPr>
+        <p:spPr>
+          <a:xfrm>
+            <a:off x="1600200" y="3749039"/>
+            <a:ext cx="1737360" cy="457200"/>
+          </a:xfrm>
+          <a:prstGeom prst="rect">
+            <a:avLst/>
+          </a:prstGeom>
+          <a:solidFill>
+            <a:srgbClr val="2E7D32"/>
+          </a:solidFill>
+          <a:ln>
+            <a:noFill/>
+          </a:ln>
+        </p:spPr>
+        <p:style>
+          <a:lnRef idx="1">
+            <a:schemeClr val="accent1"/>
+          </a:lnRef>
+          <a:fillRef idx="3">
+            <a:schemeClr val="accent1"/>
+          </a:fillRef>
+          <a:effectRef idx="2">
+            <a:schemeClr val="accent1"/>
+          </a:effectRef>
+          <a:fontRef idx="minor">
+            <a:schemeClr val="lt1"/>
+          </a:fontRef>
+        </p:style>
+        <p:txBody>
+          <a:bodyPr rtlCol="0" anchor="ctr"/>
+          <a:lstStyle/>
+          <a:p>
+            <a:pPr algn="ctr"/>
+          </a:p>
+        </p:txBody>
+      </p:sp>
+      <p:sp>
+        <p:nvSpPr>
+          <p:cNvPr id="19" name="TextBox 18"/>
+          <p:cNvSpPr txBox="1"/>
+          <p:nvPr/>
+        </p:nvSpPr>
+        <p:spPr>
+          <a:xfrm>
+            <a:off x="1600200" y="3794759"/>
+            <a:ext cx="1737360" cy="365760"/>
+          </a:xfrm>
+          <a:prstGeom prst="rect">
+            <a:avLst/>
+          </a:prstGeom>
+          <a:noFill/>
+        </p:spPr>
+        <p:txBody>
+          <a:bodyPr wrap="square">
+            <a:spAutoFit/>
+          </a:bodyPr>
+          <a:lstStyle/>
+          <a:p>
+            <a:pPr algn="ctr"/>
+            <a:r>
+              <a:rPr sz="1100" b="1">
+                <a:solidFill>
+                  <a:srgbClr val="FFFFFF"/>
+                </a:solidFill>
+              </a:rPr>
+              <a:t>guard_rails_node</a:t>
+            </a:r>
+          </a:p>
+        </p:txBody>
+      </p:sp>
+      <p:cxnSp>
+        <p:nvCxnSpPr>
+          <p:cNvPr id="20" name="Connector 19"/>
+          <p:cNvCxnSpPr/>
+          <p:nvPr/>
+        </p:nvCxnSpPr>
+        <p:spPr>
+          <a:xfrm>
+            <a:off x="3337560" y="3977639"/>
+            <a:ext cx="228600" cy="0"/>
+          </a:xfrm>
+          <a:prstGeom prst="line">
+            <a:avLst/>
+          </a:prstGeom>
+          <a:ln w="19050">
+            <a:solidFill>
+              <a:srgbClr val="444444"/>
+            </a:solidFill>
+          </a:ln>
+        </p:spPr>
+        <p:style>
+          <a:lnRef idx="2">
+            <a:schemeClr val="accent1"/>
+          </a:lnRef>
+          <a:fillRef idx="0">
+            <a:schemeClr val="accent1"/>
+          </a:fillRef>
+          <a:effectRef idx="1">
+            <a:schemeClr val="accent1"/>
+          </a:effectRef>
+          <a:fontRef idx="minor">
+            <a:schemeClr val="tx1"/>
+          </a:fontRef>
+        </p:style>
+      </p:cxnSp>
+      <p:sp>
+        <p:nvSpPr>
+          <p:cNvPr id="21" name="Rectangle 20"/>
+          <p:cNvSpPr/>
+          <p:nvPr/>
+        </p:nvSpPr>
+        <p:spPr>
+          <a:xfrm>
+            <a:off x="3566160" y="3749039"/>
+            <a:ext cx="1737360" cy="457200"/>
+          </a:xfrm>
+          <a:prstGeom prst="rect">
+            <a:avLst/>
+          </a:prstGeom>
+          <a:solidFill>
+            <a:srgbClr val="444444"/>
+          </a:solidFill>
+          <a:ln>
+            <a:noFill/>
+          </a:ln>
+        </p:spPr>
+        <p:style>
+          <a:lnRef idx="1">
+            <a:schemeClr val="accent1"/>
+          </a:lnRef>
+          <a:fillRef idx="3">
+            <a:schemeClr val="accent1"/>
+          </a:fillRef>
+          <a:effectRef idx="2">
+            <a:schemeClr val="accent1"/>
+          </a:effectRef>
+          <a:fontRef idx="minor">
+            <a:schemeClr val="lt1"/>
+          </a:fontRef>
+        </p:style>
+        <p:txBody>
+          <a:bodyPr rtlCol="0" anchor="ctr"/>
+          <a:lstStyle/>
+          <a:p>
+            <a:pPr algn="ctr"/>
+          </a:p>
+        </p:txBody>
+      </p:sp>
+      <p:sp>
+        <p:nvSpPr>
+          <p:cNvPr id="22" name="TextBox 21"/>
+          <p:cNvSpPr txBox="1"/>
+          <p:nvPr/>
+        </p:nvSpPr>
+        <p:spPr>
+          <a:xfrm>
+            <a:off x="3566160" y="3794759"/>
+            <a:ext cx="1737360" cy="365760"/>
+          </a:xfrm>
+          <a:prstGeom prst="rect">
+            <a:avLst/>
+          </a:prstGeom>
+          <a:noFill/>
+        </p:spPr>
+        <p:txBody>
+          <a:bodyPr wrap="square">
+            <a:spAutoFit/>
+          </a:bodyPr>
+          <a:lstStyle/>
+          <a:p>
+            <a:pPr algn="ctr"/>
+            <a:r>
+              <a:rPr sz="1100" b="1">
+                <a:solidFill>
+                  <a:srgbClr val="FFFFFF"/>
+                </a:solidFill>
+              </a:rPr>
+              <a:t>respond → END</a:t>
+            </a:r>
+          </a:p>
+        </p:txBody>
+      </p:sp>
+      <p:sp>
+        <p:nvSpPr>
+          <p:cNvPr id="23" name="TextBox 22"/>
+          <p:cNvSpPr txBox="1"/>
+          <p:nvPr/>
+        </p:nvSpPr>
+        <p:spPr>
+          <a:xfrm>
+            <a:off x="6858000" y="2880360"/>
+            <a:ext cx="2286000" cy="256032"/>
+          </a:xfrm>
+          <a:prstGeom prst="rect">
+            <a:avLst/>
+          </a:prstGeom>
+          <a:noFill/>
+        </p:spPr>
+        <p:txBody>
+          <a:bodyPr wrap="square">
+            <a:spAutoFit/>
+          </a:bodyPr>
+          <a:lstStyle/>
+          <a:p>
+            <a:pPr algn="l"/>
+            <a:r>
+              <a:rPr sz="900" b="0">
+                <a:solidFill>
+                  <a:srgbClr val="444444"/>
+                </a:solidFill>
+              </a:rPr>
+              <a:t>← all fields complete</a:t>
+            </a:r>
+          </a:p>
+        </p:txBody>
+      </p:sp>
+      <p:sp>
+        <p:nvSpPr>
+          <p:cNvPr id="24" name="Rectangle 23"/>
+          <p:cNvSpPr/>
+          <p:nvPr/>
+        </p:nvSpPr>
+        <p:spPr>
+          <a:xfrm>
+            <a:off x="6858000" y="2926080"/>
+            <a:ext cx="1920240" cy="457200"/>
+          </a:xfrm>
+          <a:prstGeom prst="rect">
+            <a:avLst/>
+          </a:prstGeom>
+          <a:solidFill>
+            <a:srgbClr val="007A87"/>
+          </a:solidFill>
+          <a:ln>
+            <a:noFill/>
+          </a:ln>
+        </p:spPr>
+        <p:style>
+          <a:lnRef idx="1">
+            <a:schemeClr val="accent1"/>
+          </a:lnRef>
+          <a:fillRef idx="3">
+            <a:schemeClr val="accent1"/>
+          </a:fillRef>
+          <a:effectRef idx="2">
+            <a:schemeClr val="accent1"/>
+          </a:effectRef>
+          <a:fontRef idx="minor">
+            <a:schemeClr val="lt1"/>
+          </a:fontRef>
+        </p:style>
+        <p:txBody>
+          <a:bodyPr rtlCol="0" anchor="ctr"/>
+          <a:lstStyle/>
+          <a:p>
+            <a:pPr algn="ctr"/>
+          </a:p>
+        </p:txBody>
+      </p:sp>
+      <p:sp>
+        <p:nvSpPr>
+          <p:cNvPr id="25" name="TextBox 24"/>
+          <p:cNvSpPr txBox="1"/>
+          <p:nvPr/>
+        </p:nvSpPr>
+        <p:spPr>
+          <a:xfrm>
+            <a:off x="6858000" y="2971800"/>
+            <a:ext cx="1920240" cy="365760"/>
+          </a:xfrm>
+          <a:prstGeom prst="rect">
+            <a:avLst/>
+          </a:prstGeom>
+          <a:noFill/>
+        </p:spPr>
+        <p:txBody>
+          <a:bodyPr wrap="square">
+            <a:spAutoFit/>
+          </a:bodyPr>
+          <a:lstStyle/>
+          <a:p>
+            <a:pPr algn="ctr"/>
+            <a:r>
+              <a:rPr sz="1100" b="1">
+                <a:solidFill>
+                  <a:srgbClr val="FFFFFF"/>
+                </a:solidFill>
+              </a:rPr>
+              <a:t>reservation
+validator_node</a:t>
+            </a:r>
+          </a:p>
+        </p:txBody>
+      </p:sp>
+      <p:cxnSp>
+        <p:nvCxnSpPr>
+          <p:cNvPr id="26" name="Connector 25"/>
+          <p:cNvCxnSpPr/>
+          <p:nvPr/>
+        </p:nvCxnSpPr>
+        <p:spPr>
+          <a:xfrm>
+            <a:off x="8778240" y="3154680"/>
+            <a:ext cx="228600" cy="0"/>
+          </a:xfrm>
+          <a:prstGeom prst="line">
+            <a:avLst/>
+          </a:prstGeom>
+          <a:ln w="19050">
+            <a:solidFill>
+              <a:srgbClr val="444444"/>
+            </a:solidFill>
+          </a:ln>
+        </p:spPr>
+        <p:style>
+          <a:lnRef idx="2">
+            <a:schemeClr val="accent1"/>
+          </a:lnRef>
+          <a:fillRef idx="0">
+            <a:schemeClr val="accent1"/>
+          </a:fillRef>
+          <a:effectRef idx="1">
+            <a:schemeClr val="accent1"/>
+          </a:effectRef>
+          <a:fontRef idx="minor">
+            <a:schemeClr val="tx1"/>
+          </a:fontRef>
+        </p:style>
+      </p:cxnSp>
+      <p:sp>
+        <p:nvSpPr>
+          <p:cNvPr id="27" name="Rectangle 26"/>
+          <p:cNvSpPr/>
+          <p:nvPr/>
+        </p:nvSpPr>
+        <p:spPr>
+          <a:xfrm>
+            <a:off x="9006840" y="2926080"/>
+            <a:ext cx="1920240" cy="457200"/>
+          </a:xfrm>
+          <a:prstGeom prst="rect">
+            <a:avLst/>
+          </a:prstGeom>
+          <a:solidFill>
+            <a:srgbClr val="F57C00"/>
+          </a:solidFill>
+          <a:ln>
+            <a:noFill/>
+          </a:ln>
+        </p:spPr>
+        <p:style>
+          <a:lnRef idx="1">
+            <a:schemeClr val="accent1"/>
+          </a:lnRef>
+          <a:fillRef idx="3">
+            <a:schemeClr val="accent1"/>
+          </a:fillRef>
+          <a:effectRef idx="2">
+            <a:schemeClr val="accent1"/>
+          </a:effectRef>
+          <a:fontRef idx="minor">
+            <a:schemeClr val="lt1"/>
+          </a:fontRef>
+        </p:style>
+        <p:txBody>
+          <a:bodyPr rtlCol="0" anchor="ctr"/>
+          <a:lstStyle/>
+          <a:p>
+            <a:pPr algn="ctr"/>
+          </a:p>
+        </p:txBody>
+      </p:sp>
+      <p:sp>
+        <p:nvSpPr>
+          <p:cNvPr id="28" name="TextBox 27"/>
+          <p:cNvSpPr txBox="1"/>
+          <p:nvPr/>
+        </p:nvSpPr>
+        <p:spPr>
+          <a:xfrm>
+            <a:off x="9006840" y="2971800"/>
+            <a:ext cx="1920240" cy="365760"/>
+          </a:xfrm>
+          <a:prstGeom prst="rect">
+            <a:avLst/>
+          </a:prstGeom>
+          <a:noFill/>
+        </p:spPr>
+        <p:txBody>
+          <a:bodyPr wrap="square">
+            <a:spAutoFit/>
+          </a:bodyPr>
+          <a:lstStyle/>
+          <a:p>
+            <a:pPr algn="ctr"/>
+            <a:r>
+              <a:rPr sz="1100" b="1">
+                <a:solidFill>
+                  <a:srgbClr val="FFFFFF"/>
+                </a:solidFill>
+              </a:rPr>
+              <a:t>approval_request
+_node</a:t>
+            </a:r>
+          </a:p>
+        </p:txBody>
+      </p:sp>
+      <p:cxnSp>
+        <p:nvCxnSpPr>
+          <p:cNvPr id="29" name="Connector 28"/>
+          <p:cNvCxnSpPr/>
+          <p:nvPr/>
+        </p:nvCxnSpPr>
+        <p:spPr>
+          <a:xfrm>
+            <a:off x="10927080" y="3154680"/>
+            <a:ext cx="228600" cy="0"/>
+          </a:xfrm>
+          <a:prstGeom prst="line">
+            <a:avLst/>
+          </a:prstGeom>
+          <a:ln w="19050">
+            <a:solidFill>
+              <a:srgbClr val="444444"/>
+            </a:solidFill>
+          </a:ln>
+        </p:spPr>
+        <p:style>
+          <a:lnRef idx="2">
+            <a:schemeClr val="accent1"/>
+          </a:lnRef>
+          <a:fillRef idx="0">
+            <a:schemeClr val="accent1"/>
+          </a:fillRef>
+          <a:effectRef idx="1">
+            <a:schemeClr val="accent1"/>
+          </a:effectRef>
+          <a:fontRef idx="minor">
+            <a:schemeClr val="tx1"/>
+          </a:fontRef>
+        </p:style>
+      </p:cxnSp>
+      <p:sp>
+        <p:nvSpPr>
+          <p:cNvPr id="30" name="Rectangle 29"/>
+          <p:cNvSpPr/>
+          <p:nvPr/>
+        </p:nvSpPr>
+        <p:spPr>
+          <a:xfrm>
+            <a:off x="10972800" y="2926080"/>
+            <a:ext cx="914400" cy="457200"/>
+          </a:xfrm>
+          <a:prstGeom prst="rect">
+            <a:avLst/>
+          </a:prstGeom>
+          <a:solidFill>
+            <a:srgbClr val="2E7D32"/>
+          </a:solidFill>
+          <a:ln>
+            <a:noFill/>
+          </a:ln>
+        </p:spPr>
+        <p:style>
+          <a:lnRef idx="1">
+            <a:schemeClr val="accent1"/>
+          </a:lnRef>
+          <a:fillRef idx="3">
+            <a:schemeClr val="accent1"/>
+          </a:fillRef>
+          <a:effectRef idx="2">
+            <a:schemeClr val="accent1"/>
+          </a:effectRef>
+          <a:fontRef idx="minor">
+            <a:schemeClr val="lt1"/>
+          </a:fontRef>
+        </p:style>
+        <p:txBody>
+          <a:bodyPr rtlCol="0" anchor="ctr"/>
+          <a:lstStyle/>
+          <a:p>
+            <a:pPr algn="ctr"/>
+          </a:p>
+        </p:txBody>
+      </p:sp>
+      <p:sp>
+        <p:nvSpPr>
+          <p:cNvPr id="31" name="TextBox 30"/>
+          <p:cNvSpPr txBox="1"/>
+          <p:nvPr/>
+        </p:nvSpPr>
+        <p:spPr>
+          <a:xfrm>
+            <a:off x="10972800" y="2971800"/>
+            <a:ext cx="914400" cy="365760"/>
+          </a:xfrm>
+          <a:prstGeom prst="rect">
+            <a:avLst/>
+          </a:prstGeom>
+          <a:noFill/>
+        </p:spPr>
+        <p:txBody>
+          <a:bodyPr wrap="square">
+            <a:spAutoFit/>
+          </a:bodyPr>
+          <a:lstStyle/>
+          <a:p>
+            <a:pPr algn="ctr"/>
+            <a:r>
+              <a:rPr sz="1100" b="1">
+                <a:solidFill>
+                  <a:srgbClr val="FFFFFF"/>
+                </a:solidFill>
+              </a:rPr>
+              <a:t>guard_rails
+→ respond</a:t>
+            </a:r>
+          </a:p>
+        </p:txBody>
+      </p:sp>
+      <p:sp>
+        <p:nvSpPr>
+          <p:cNvPr id="32" name="Rectangle 31"/>
+          <p:cNvSpPr/>
+          <p:nvPr/>
+        </p:nvSpPr>
+        <p:spPr>
+          <a:xfrm>
+            <a:off x="274320" y="4572000"/>
+            <a:ext cx="11612880" cy="411480"/>
+          </a:xfrm>
+          <a:prstGeom prst="rect">
+            <a:avLst/>
+          </a:prstGeom>
+          <a:solidFill>
+            <a:srgbClr val="1A376C"/>
+          </a:solidFill>
+          <a:ln>
+            <a:noFill/>
+          </a:ln>
+        </p:spPr>
+        <p:style>
+          <a:lnRef idx="1">
+            <a:schemeClr val="accent1"/>
+          </a:lnRef>
+          <a:fillRef idx="3">
+            <a:schemeClr val="accent1"/>
+          </a:fillRef>
+          <a:effectRef idx="2">
+            <a:schemeClr val="accent1"/>
+          </a:effectRef>
+          <a:fontRef idx="minor">
+            <a:schemeClr val="lt1"/>
+          </a:fontRef>
+        </p:style>
+        <p:txBody>
+          <a:bodyPr rtlCol="0" anchor="ctr"/>
+          <a:lstStyle/>
+          <a:p>
+            <a:pPr algn="ctr"/>
+          </a:p>
+        </p:txBody>
+      </p:sp>
+      <p:sp>
+        <p:nvSpPr>
+          <p:cNvPr id="33" name="TextBox 32"/>
+          <p:cNvSpPr txBox="1"/>
+          <p:nvPr/>
+        </p:nvSpPr>
+        <p:spPr>
+          <a:xfrm>
+            <a:off x="411480" y="4599432"/>
+            <a:ext cx="11430000" cy="320040"/>
+          </a:xfrm>
+          <a:prstGeom prst="rect">
+            <a:avLst/>
+          </a:prstGeom>
+          <a:noFill/>
+        </p:spPr>
+        <p:txBody>
+          <a:bodyPr wrap="square">
+            <a:spAutoFit/>
+          </a:bodyPr>
+          <a:lstStyle/>
+          <a:p>
+            <a:pPr algn="l"/>
+            <a:r>
+              <a:rPr sz="1300" b="1">
+                <a:solidFill>
+                  <a:srgbClr val="FFFFFF"/>
+                </a:solidFill>
+              </a:rPr>
+              <a:t>Reservation Status Lifecycle</a:t>
+            </a:r>
+          </a:p>
+        </p:txBody>
+      </p:sp>
+      <p:sp>
+        <p:nvSpPr>
+          <p:cNvPr id="34" name="Rectangle 33"/>
+          <p:cNvSpPr/>
+          <p:nvPr/>
+        </p:nvSpPr>
+        <p:spPr>
+          <a:xfrm>
+            <a:off x="274320" y="5029200"/>
+            <a:ext cx="2148840" cy="457200"/>
+          </a:xfrm>
+          <a:prstGeom prst="rect">
+            <a:avLst/>
+          </a:prstGeom>
+          <a:solidFill>
+            <a:srgbClr val="444444"/>
+          </a:solidFill>
+          <a:ln>
+            <a:noFill/>
+          </a:ln>
+        </p:spPr>
+        <p:style>
+          <a:lnRef idx="1">
+            <a:schemeClr val="accent1"/>
+          </a:lnRef>
+          <a:fillRef idx="3">
+            <a:schemeClr val="accent1"/>
+          </a:fillRef>
+          <a:effectRef idx="2">
+            <a:schemeClr val="accent1"/>
+          </a:effectRef>
+          <a:fontRef idx="minor">
+            <a:schemeClr val="lt1"/>
+          </a:fontRef>
+        </p:style>
+        <p:txBody>
+          <a:bodyPr rtlCol="0" anchor="ctr"/>
+          <a:lstStyle/>
+          <a:p>
+            <a:pPr algn="ctr"/>
+          </a:p>
+        </p:txBody>
+      </p:sp>
+      <p:sp>
+        <p:nvSpPr>
+          <p:cNvPr id="35" name="TextBox 34"/>
+          <p:cNvSpPr txBox="1"/>
+          <p:nvPr/>
+        </p:nvSpPr>
+        <p:spPr>
+          <a:xfrm>
+            <a:off x="274320" y="5047488"/>
+            <a:ext cx="2148840" cy="384048"/>
+          </a:xfrm>
+          <a:prstGeom prst="rect">
+            <a:avLst/>
+          </a:prstGeom>
+          <a:noFill/>
+        </p:spPr>
+        <p:txBody>
+          <a:bodyPr wrap="square">
+            <a:spAutoFit/>
+          </a:bodyPr>
+          <a:lstStyle/>
+          <a:p>
+            <a:pPr algn="ctr"/>
+            <a:r>
+              <a:rPr sz="1200" b="1">
+                <a:solidFill>
+                  <a:srgbClr val="FFFFFF"/>
+                </a:solidFill>
+              </a:rPr>
+              <a:t>draft</a:t>
+            </a:r>
+          </a:p>
+        </p:txBody>
+      </p:sp>
+      <p:sp>
+        <p:nvSpPr>
+          <p:cNvPr id="36" name="TextBox 35"/>
+          <p:cNvSpPr txBox="1"/>
+          <p:nvPr/>
+        </p:nvSpPr>
+        <p:spPr>
+          <a:xfrm>
+            <a:off x="2423160" y="5047488"/>
+            <a:ext cx="137160" cy="384048"/>
+          </a:xfrm>
+          <a:prstGeom prst="rect">
+            <a:avLst/>
+          </a:prstGeom>
+          <a:noFill/>
+        </p:spPr>
+        <p:txBody>
+          <a:bodyPr wrap="square">
+            <a:spAutoFit/>
+          </a:bodyPr>
+          <a:lstStyle/>
+          <a:p>
+            <a:pPr algn="ctr"/>
+            <a:r>
+              <a:rPr sz="1400" b="1">
+                <a:solidFill>
+                  <a:srgbClr val="444444"/>
+                </a:solidFill>
+              </a:rPr>
+              <a:t>→</a:t>
+            </a:r>
+          </a:p>
+        </p:txBody>
+      </p:sp>
+      <p:sp>
+        <p:nvSpPr>
+          <p:cNvPr id="37" name="Rectangle 36"/>
+          <p:cNvSpPr/>
+          <p:nvPr/>
+        </p:nvSpPr>
+        <p:spPr>
+          <a:xfrm>
+            <a:off x="2532888" y="5029200"/>
+            <a:ext cx="2148840" cy="457200"/>
+          </a:xfrm>
+          <a:prstGeom prst="rect">
+            <a:avLst/>
+          </a:prstGeom>
+          <a:solidFill>
+            <a:srgbClr val="007A87"/>
+          </a:solidFill>
+          <a:ln>
+            <a:noFill/>
+          </a:ln>
+        </p:spPr>
+        <p:style>
+          <a:lnRef idx="1">
+            <a:schemeClr val="accent1"/>
+          </a:lnRef>
+          <a:fillRef idx="3">
+            <a:schemeClr val="accent1"/>
+          </a:fillRef>
+          <a:effectRef idx="2">
+            <a:schemeClr val="accent1"/>
+          </a:effectRef>
+          <a:fontRef idx="minor">
+            <a:schemeClr val="lt1"/>
+          </a:fontRef>
+        </p:style>
+        <p:txBody>
+          <a:bodyPr rtlCol="0" anchor="ctr"/>
+          <a:lstStyle/>
+          <a:p>
+            <a:pPr algn="ctr"/>
+          </a:p>
+        </p:txBody>
+      </p:sp>
+      <p:sp>
+        <p:nvSpPr>
+          <p:cNvPr id="38" name="TextBox 37"/>
+          <p:cNvSpPr txBox="1"/>
+          <p:nvPr/>
+        </p:nvSpPr>
+        <p:spPr>
+          <a:xfrm>
+            <a:off x="2532888" y="5047488"/>
+            <a:ext cx="2148840" cy="384048"/>
+          </a:xfrm>
+          <a:prstGeom prst="rect">
+            <a:avLst/>
+          </a:prstGeom>
+          <a:noFill/>
+        </p:spPr>
+        <p:txBody>
+          <a:bodyPr wrap="square">
+            <a:spAutoFit/>
+          </a:bodyPr>
+          <a:lstStyle/>
+          <a:p>
+            <a:pPr algn="ctr"/>
+            <a:r>
+              <a:rPr sz="1200" b="1">
+                <a:solidFill>
+                  <a:srgbClr val="FFFFFF"/>
+                </a:solidFill>
+              </a:rPr>
+              <a:t>submitted</a:t>
+            </a:r>
+          </a:p>
+        </p:txBody>
+      </p:sp>
+      <p:sp>
+        <p:nvSpPr>
+          <p:cNvPr id="39" name="TextBox 38"/>
+          <p:cNvSpPr txBox="1"/>
+          <p:nvPr/>
+        </p:nvSpPr>
+        <p:spPr>
+          <a:xfrm>
+            <a:off x="4681728" y="5047488"/>
+            <a:ext cx="137160" cy="384048"/>
+          </a:xfrm>
+          <a:prstGeom prst="rect">
+            <a:avLst/>
+          </a:prstGeom>
+          <a:noFill/>
+        </p:spPr>
+        <p:txBody>
+          <a:bodyPr wrap="square">
+            <a:spAutoFit/>
+          </a:bodyPr>
+          <a:lstStyle/>
+          <a:p>
+            <a:pPr algn="ctr"/>
+            <a:r>
+              <a:rPr sz="1400" b="1">
+                <a:solidFill>
+                  <a:srgbClr val="444444"/>
+                </a:solidFill>
+              </a:rPr>
+              <a:t>→</a:t>
+            </a:r>
+          </a:p>
+        </p:txBody>
+      </p:sp>
+      <p:sp>
+        <p:nvSpPr>
+          <p:cNvPr id="40" name="Rectangle 39"/>
+          <p:cNvSpPr/>
+          <p:nvPr/>
+        </p:nvSpPr>
+        <p:spPr>
+          <a:xfrm>
+            <a:off x="4791456" y="5029200"/>
+            <a:ext cx="2148840" cy="457200"/>
+          </a:xfrm>
+          <a:prstGeom prst="rect">
+            <a:avLst/>
+          </a:prstGeom>
+          <a:solidFill>
+            <a:srgbClr val="F57C00"/>
+          </a:solidFill>
+          <a:ln>
+            <a:noFill/>
+          </a:ln>
+        </p:spPr>
+        <p:style>
+          <a:lnRef idx="1">
+            <a:schemeClr val="accent1"/>
+          </a:lnRef>
+          <a:fillRef idx="3">
+            <a:schemeClr val="accent1"/>
+          </a:fillRef>
+          <a:effectRef idx="2">
+            <a:schemeClr val="accent1"/>
+          </a:effectRef>
+          <a:fontRef idx="minor">
+            <a:schemeClr val="lt1"/>
+          </a:fontRef>
+        </p:style>
+        <p:txBody>
+          <a:bodyPr rtlCol="0" anchor="ctr"/>
+          <a:lstStyle/>
+          <a:p>
+            <a:pPr algn="ctr"/>
+          </a:p>
+        </p:txBody>
+      </p:sp>
+      <p:sp>
+        <p:nvSpPr>
+          <p:cNvPr id="41" name="TextBox 40"/>
+          <p:cNvSpPr txBox="1"/>
+          <p:nvPr/>
+        </p:nvSpPr>
+        <p:spPr>
+          <a:xfrm>
+            <a:off x="4791456" y="5047488"/>
+            <a:ext cx="2148840" cy="384048"/>
+          </a:xfrm>
+          <a:prstGeom prst="rect">
+            <a:avLst/>
+          </a:prstGeom>
+          <a:noFill/>
+        </p:spPr>
+        <p:txBody>
+          <a:bodyPr wrap="square">
+            <a:spAutoFit/>
+          </a:bodyPr>
+          <a:lstStyle/>
+          <a:p>
+            <a:pPr algn="ctr"/>
+            <a:r>
+              <a:rPr sz="1200" b="1">
+                <a:solidFill>
+                  <a:srgbClr val="FFFFFF"/>
+                </a:solidFill>
+              </a:rPr>
+              <a:t>pending_approval</a:t>
+            </a:r>
+          </a:p>
+        </p:txBody>
+      </p:sp>
+      <p:sp>
+        <p:nvSpPr>
+          <p:cNvPr id="42" name="TextBox 41"/>
+          <p:cNvSpPr txBox="1"/>
+          <p:nvPr/>
+        </p:nvSpPr>
+        <p:spPr>
+          <a:xfrm>
+            <a:off x="6940296" y="5047488"/>
+            <a:ext cx="137160" cy="384048"/>
+          </a:xfrm>
+          <a:prstGeom prst="rect">
+            <a:avLst/>
+          </a:prstGeom>
+          <a:noFill/>
+        </p:spPr>
+        <p:txBody>
+          <a:bodyPr wrap="square">
+            <a:spAutoFit/>
+          </a:bodyPr>
+          <a:lstStyle/>
+          <a:p>
+            <a:pPr algn="ctr"/>
+            <a:r>
+              <a:rPr sz="1400" b="1">
+                <a:solidFill>
+                  <a:srgbClr val="444444"/>
+                </a:solidFill>
+              </a:rPr>
+              <a:t>→</a:t>
+            </a:r>
+          </a:p>
+        </p:txBody>
+      </p:sp>
+      <p:sp>
+        <p:nvSpPr>
+          <p:cNvPr id="43" name="Rectangle 42"/>
+          <p:cNvSpPr/>
+          <p:nvPr/>
+        </p:nvSpPr>
+        <p:spPr>
+          <a:xfrm>
+            <a:off x="7050024" y="5029200"/>
+            <a:ext cx="2148840" cy="457200"/>
+          </a:xfrm>
+          <a:prstGeom prst="rect">
+            <a:avLst/>
+          </a:prstGeom>
+          <a:solidFill>
+            <a:srgbClr val="2E7D32"/>
+          </a:solidFill>
+          <a:ln>
+            <a:noFill/>
+          </a:ln>
+        </p:spPr>
+        <p:style>
+          <a:lnRef idx="1">
+            <a:schemeClr val="accent1"/>
+          </a:lnRef>
+          <a:fillRef idx="3">
+            <a:schemeClr val="accent1"/>
+          </a:fillRef>
+          <a:effectRef idx="2">
+            <a:schemeClr val="accent1"/>
+          </a:effectRef>
+          <a:fontRef idx="minor">
+            <a:schemeClr val="lt1"/>
+          </a:fontRef>
+        </p:style>
+        <p:txBody>
+          <a:bodyPr rtlCol="0" anchor="ctr"/>
+          <a:lstStyle/>
+          <a:p>
+            <a:pPr algn="ctr"/>
+          </a:p>
+        </p:txBody>
+      </p:sp>
+      <p:sp>
+        <p:nvSpPr>
+          <p:cNvPr id="44" name="TextBox 43"/>
+          <p:cNvSpPr txBox="1"/>
+          <p:nvPr/>
+        </p:nvSpPr>
+        <p:spPr>
+          <a:xfrm>
+            <a:off x="7050024" y="5047488"/>
+            <a:ext cx="2148840" cy="384048"/>
+          </a:xfrm>
+          <a:prstGeom prst="rect">
+            <a:avLst/>
+          </a:prstGeom>
+          <a:noFill/>
+        </p:spPr>
+        <p:txBody>
+          <a:bodyPr wrap="square">
+            <a:spAutoFit/>
+          </a:bodyPr>
+          <a:lstStyle/>
+          <a:p>
+            <a:pPr algn="ctr"/>
+            <a:r>
+              <a:rPr sz="1200" b="1">
+                <a:solidFill>
+                  <a:srgbClr val="FFFFFF"/>
+                </a:solidFill>
+              </a:rPr>
+              <a:t>approved</a:t>
+            </a:r>
+          </a:p>
+        </p:txBody>
+      </p:sp>
+      <p:sp>
+        <p:nvSpPr>
+          <p:cNvPr id="45" name="TextBox 44"/>
+          <p:cNvSpPr txBox="1"/>
+          <p:nvPr/>
+        </p:nvSpPr>
+        <p:spPr>
+          <a:xfrm>
+            <a:off x="9198864" y="5047488"/>
+            <a:ext cx="137160" cy="384048"/>
+          </a:xfrm>
+          <a:prstGeom prst="rect">
+            <a:avLst/>
+          </a:prstGeom>
+          <a:noFill/>
+        </p:spPr>
+        <p:txBody>
+          <a:bodyPr wrap="square">
+            <a:spAutoFit/>
+          </a:bodyPr>
+          <a:lstStyle/>
+          <a:p>
+            <a:pPr algn="ctr"/>
+            <a:r>
+              <a:rPr sz="1400" b="1">
+                <a:solidFill>
+                  <a:srgbClr val="444444"/>
+                </a:solidFill>
+              </a:rPr>
+              <a:t>→</a:t>
+            </a:r>
+          </a:p>
+        </p:txBody>
+      </p:sp>
+      <p:sp>
+        <p:nvSpPr>
+          <p:cNvPr id="46" name="Rectangle 45"/>
+          <p:cNvSpPr/>
+          <p:nvPr/>
+        </p:nvSpPr>
+        <p:spPr>
+          <a:xfrm>
+            <a:off x="9308592" y="5029200"/>
+            <a:ext cx="2148840" cy="457200"/>
           </a:xfrm>
           <a:prstGeom prst="rect">
             <a:avLst/>
@@ -6573,137 +8032,87 @@
           <a:lstStyle/>
           <a:p>
             <a:pPr algn="ctr"/>
-            <a:endParaRPr/>
-          </a:p>
-        </p:txBody>
-      </p:sp>
-      <p:sp>
-        <p:nvSpPr>
-          <p:cNvPr id="8" name="TextBox 7"/>
-          <p:cNvSpPr txBox="1"/>
-          <p:nvPr/>
-        </p:nvSpPr>
-        <p:spPr>
-          <a:xfrm>
-            <a:off x="365760" y="1444752"/>
-            <a:ext cx="3474720" cy="347472"/>
-          </a:xfrm>
-          <a:prstGeom prst="rect">
-            <a:avLst/>
-          </a:prstGeom>
-          <a:noFill/>
-        </p:spPr>
-        <p:txBody>
-          <a:bodyPr wrap="square">
-            <a:spAutoFit/>
-          </a:bodyPr>
-          <a:lstStyle/>
-          <a:p>
-            <a:pPr algn="l"/>
-            <a:r>
-              <a:rPr sz="1400" b="1">
+          </a:p>
+        </p:txBody>
+      </p:sp>
+      <p:sp>
+        <p:nvSpPr>
+          <p:cNvPr id="47" name="TextBox 46"/>
+          <p:cNvSpPr txBox="1"/>
+          <p:nvPr/>
+        </p:nvSpPr>
+        <p:spPr>
+          <a:xfrm>
+            <a:off x="9308592" y="5047488"/>
+            <a:ext cx="2148840" cy="384048"/>
+          </a:xfrm>
+          <a:prstGeom prst="rect">
+            <a:avLst/>
+          </a:prstGeom>
+          <a:noFill/>
+        </p:spPr>
+        <p:txBody>
+          <a:bodyPr wrap="square">
+            <a:spAutoFit/>
+          </a:bodyPr>
+          <a:lstStyle/>
+          <a:p>
+            <a:pPr algn="ctr"/>
+            <a:r>
+              <a:rPr sz="1200" b="1">
                 <a:solidFill>
                   <a:srgbClr val="FFFFFF"/>
                 </a:solidFill>
               </a:rPr>
-              <a:t>Testing</a:t>
-            </a:r>
-          </a:p>
-        </p:txBody>
-      </p:sp>
-      <p:sp>
-        <p:nvSpPr>
-          <p:cNvPr id="9" name="TextBox 8"/>
-          <p:cNvSpPr txBox="1"/>
-          <p:nvPr/>
-        </p:nvSpPr>
-        <p:spPr>
-          <a:xfrm>
-            <a:off x="365760" y="1920240"/>
-            <a:ext cx="3474720" cy="3931920"/>
-          </a:xfrm>
-          <a:prstGeom prst="rect">
-            <a:avLst/>
-          </a:prstGeom>
-          <a:noFill/>
-        </p:spPr>
-        <p:txBody>
-          <a:bodyPr wrap="square">
-            <a:spAutoFit/>
-          </a:bodyPr>
-          <a:lstStyle/>
-          <a:p>
-            <a:pPr>
-              <a:spcBef>
-                <a:spcPts val="300"/>
-              </a:spcBef>
-            </a:pPr>
-            <a:r>
-              <a:rPr sz="1300">
+              <a:t>rejected / expired</a:t>
+            </a:r>
+          </a:p>
+        </p:txBody>
+      </p:sp>
+      <p:sp>
+        <p:nvSpPr>
+          <p:cNvPr id="48" name="TextBox 47"/>
+          <p:cNvSpPr txBox="1"/>
+          <p:nvPr/>
+        </p:nvSpPr>
+        <p:spPr>
+          <a:xfrm>
+            <a:off x="274320" y="5669280"/>
+            <a:ext cx="11612880" cy="320040"/>
+          </a:xfrm>
+          <a:prstGeom prst="rect">
+            <a:avLst/>
+          </a:prstGeom>
+          <a:noFill/>
+        </p:spPr>
+        <p:txBody>
+          <a:bodyPr wrap="square">
+            <a:spAutoFit/>
+          </a:bodyPr>
+          <a:lstStyle/>
+          <a:p>
+            <a:pPr algn="ctr"/>
+            <a:r>
+              <a:rPr sz="1100" b="0">
                 <a:solidFill>
                   <a:srgbClr val="444444"/>
                 </a:solidFill>
               </a:rPr>
-              <a:t>• Add pytest-docker fixture for Milvus integration tests</a:t>
-            </a:r>
-          </a:p>
-          <a:p>
-            <a:pPr>
-              <a:spcBef>
-                <a:spcPts val="300"/>
-              </a:spcBef>
-            </a:pPr>
-            <a:r>
-              <a:rPr sz="1300">
-                <a:solidFill>
-                  <a:srgbClr val="444444"/>
-                </a:solidFill>
-              </a:rPr>
-              <a:t>• Wire integration tests into GitHub Actions with services: block</a:t>
-            </a:r>
-          </a:p>
-          <a:p>
-            <a:pPr>
-              <a:spcBef>
-                <a:spcPts val="300"/>
-              </a:spcBef>
-            </a:pPr>
-            <a:r>
-              <a:rPr sz="1300">
-                <a:solidFill>
-                  <a:srgbClr val="444444"/>
-                </a:solidFill>
-              </a:rPr>
-              <a:t>• Back-fill relevant_chunk_ids in eval dataset post-ingest</a:t>
-            </a:r>
-          </a:p>
-          <a:p>
-            <a:pPr>
-              <a:spcBef>
-                <a:spcPts val="300"/>
-              </a:spcBef>
-            </a:pPr>
-            <a:r>
-              <a:rPr sz="1300">
-                <a:solidFill>
-                  <a:srgbClr val="444444"/>
-                </a:solidFill>
-              </a:rPr>
-              <a:t>• Add OpenAI mock to ingest_documents unit test</a:t>
-            </a:r>
-          </a:p>
-        </p:txBody>
-      </p:sp>
-      <p:sp>
-        <p:nvSpPr>
-          <p:cNvPr id="10" name="Rectangle 9"/>
+              <a:t>PendingStore: module-level dict (session_id→request_id, request_id→ApprovalRequest)  ·  Lazy timeout checked per user message  ·  smtplib (stdlib, sync)  ·  MailHog for dev</a:t>
+            </a:r>
+          </a:p>
+        </p:txBody>
+      </p:sp>
+      <p:sp>
+        <p:nvSpPr>
+          <p:cNvPr id="49" name="Rectangle 48"/>
           <p:cNvSpPr/>
           <p:nvPr/>
         </p:nvSpPr>
         <p:spPr>
           <a:xfrm>
-            <a:off x="4169664" y="1417320"/>
-            <a:ext cx="3657600" cy="4572000"/>
+            <a:off x="274320" y="6080760"/>
+            <a:ext cx="11612880" cy="548640"/>
           </a:xfrm>
           <a:prstGeom prst="rect">
             <a:avLst/>
@@ -6734,20 +8143,168 @@
           <a:lstStyle/>
           <a:p>
             <a:pPr algn="ctr"/>
-            <a:endParaRPr/>
-          </a:p>
-        </p:txBody>
-      </p:sp>
-      <p:sp>
-        <p:nvSpPr>
-          <p:cNvPr id="11" name="Rectangle 10"/>
+          </a:p>
+        </p:txBody>
+      </p:sp>
+      <p:sp>
+        <p:nvSpPr>
+          <p:cNvPr id="50" name="Rectangle 49"/>
           <p:cNvSpPr/>
           <p:nvPr/>
         </p:nvSpPr>
         <p:spPr>
           <a:xfrm>
-            <a:off x="4169664" y="1417320"/>
-            <a:ext cx="3657600" cy="411480"/>
+            <a:off x="320040" y="6126480"/>
+            <a:ext cx="11521440" cy="475488"/>
+          </a:xfrm>
+          <a:prstGeom prst="rect">
+            <a:avLst/>
+          </a:prstGeom>
+          <a:solidFill>
+            <a:srgbClr val="282C34"/>
+          </a:solidFill>
+          <a:ln>
+            <a:noFill/>
+          </a:ln>
+        </p:spPr>
+        <p:style>
+          <a:lnRef idx="1">
+            <a:schemeClr val="accent1"/>
+          </a:lnRef>
+          <a:fillRef idx="3">
+            <a:schemeClr val="accent1"/>
+          </a:fillRef>
+          <a:effectRef idx="2">
+            <a:schemeClr val="accent1"/>
+          </a:effectRef>
+          <a:fontRef idx="minor">
+            <a:schemeClr val="lt1"/>
+          </a:fontRef>
+        </p:style>
+        <p:txBody>
+          <a:bodyPr rtlCol="0" anchor="ctr"/>
+          <a:lstStyle/>
+          <a:p>
+            <a:pPr algn="ctr"/>
+          </a:p>
+        </p:txBody>
+      </p:sp>
+      <p:sp>
+        <p:nvSpPr>
+          <p:cNvPr id="51" name="TextBox 50"/>
+          <p:cNvSpPr txBox="1"/>
+          <p:nvPr/>
+        </p:nvSpPr>
+        <p:spPr>
+          <a:xfrm>
+            <a:off x="429768" y="6199632"/>
+            <a:ext cx="11301984" cy="329184"/>
+          </a:xfrm>
+          <a:prstGeom prst="rect">
+            <a:avLst/>
+          </a:prstGeom>
+          <a:noFill/>
+        </p:spPr>
+        <p:txBody>
+          <a:bodyPr wrap="none">
+            <a:spAutoFit/>
+          </a:bodyPr>
+          <a:lstStyle/>
+          <a:p>
+            <a:r>
+              <a:rPr sz="1000">
+                <a:solidFill>
+                  <a:srgbClr val="ABB2BF"/>
+                </a:solidFill>
+                <a:latin typeface="Courier New"/>
+              </a:rPr>
+              <a:t>POST /admin/reservation/{request_id}/approve          → 204 (or 401 / 404 / 409)</a:t>
+            </a:r>
+          </a:p>
+          <a:p>
+            <a:r>
+              <a:rPr sz="1000">
+                <a:solidFill>
+                  <a:srgbClr val="ABB2BF"/>
+                </a:solidFill>
+                <a:latin typeface="Courier New"/>
+              </a:rPr>
+              <a:t>POST /admin/reservation/{request_id}/reject  {reason}  → 204 (or 401 / 404 / 409)</a:t>
+            </a:r>
+          </a:p>
+        </p:txBody>
+      </p:sp>
+    </p:spTree>
+  </p:cSld>
+  <p:clrMapOvr>
+    <a:masterClrMapping/>
+  </p:clrMapOvr>
+</p:sld>
+</file>
+
+<file path=ppt/slides/slide13.xml><?xml version="1.0" encoding="utf-8"?>
+<p:sld xmlns:a="http://schemas.openxmlformats.org/drawingml/2006/main" xmlns:p="http://schemas.openxmlformats.org/presentationml/2006/main" xmlns:r="http://schemas.openxmlformats.org/officeDocument/2006/relationships">
+  <p:cSld>
+    <p:spTree>
+      <p:nvGrpSpPr>
+        <p:cNvPr id="1" name=""/>
+        <p:cNvGrpSpPr/>
+        <p:nvPr/>
+      </p:nvGrpSpPr>
+      <p:grpSpPr/>
+      <p:sp>
+        <p:nvSpPr>
+          <p:cNvPr id="2" name="Rectangle 1"/>
+          <p:cNvSpPr/>
+          <p:nvPr/>
+        </p:nvSpPr>
+        <p:spPr>
+          <a:xfrm>
+            <a:off x="0" y="0"/>
+            <a:ext cx="12188952" cy="6858000"/>
+          </a:xfrm>
+          <a:prstGeom prst="rect">
+            <a:avLst/>
+          </a:prstGeom>
+          <a:solidFill>
+            <a:srgbClr val="F4F6F8"/>
+          </a:solidFill>
+          <a:ln>
+            <a:noFill/>
+          </a:ln>
+        </p:spPr>
+        <p:style>
+          <a:lnRef idx="1">
+            <a:schemeClr val="accent1"/>
+          </a:lnRef>
+          <a:fillRef idx="3">
+            <a:schemeClr val="accent1"/>
+          </a:fillRef>
+          <a:effectRef idx="2">
+            <a:schemeClr val="accent1"/>
+          </a:effectRef>
+          <a:fontRef idx="minor">
+            <a:schemeClr val="lt1"/>
+          </a:fontRef>
+        </p:style>
+        <p:txBody>
+          <a:bodyPr rtlCol="0" anchor="ctr"/>
+          <a:lstStyle/>
+          <a:p>
+            <a:pPr algn="ctr"/>
+          </a:p>
+        </p:txBody>
+      </p:sp>
+      <p:sp>
+        <p:nvSpPr>
+          <p:cNvPr id="3" name="Rectangle 2"/>
+          <p:cNvSpPr/>
+          <p:nvPr/>
+        </p:nvSpPr>
+        <p:spPr>
+          <a:xfrm>
+            <a:off x="0" y="0"/>
+            <a:ext cx="12188952" cy="1280160"/>
           </a:xfrm>
           <a:prstGeom prst="rect">
             <a:avLst/>
@@ -6778,20 +8335,19 @@
           <a:lstStyle/>
           <a:p>
             <a:pPr algn="ctr"/>
-            <a:endParaRPr/>
-          </a:p>
-        </p:txBody>
-      </p:sp>
-      <p:sp>
-        <p:nvSpPr>
-          <p:cNvPr id="12" name="TextBox 11"/>
-          <p:cNvSpPr txBox="1"/>
-          <p:nvPr/>
-        </p:nvSpPr>
-        <p:spPr>
-          <a:xfrm>
-            <a:off x="4261104" y="1444752"/>
-            <a:ext cx="3474720" cy="347472"/>
+          </a:p>
+        </p:txBody>
+      </p:sp>
+      <p:sp>
+        <p:nvSpPr>
+          <p:cNvPr id="4" name="TextBox 3"/>
+          <p:cNvSpPr txBox="1"/>
+          <p:nvPr/>
+        </p:nvSpPr>
+        <p:spPr>
+          <a:xfrm>
+            <a:off x="365760" y="137160"/>
+            <a:ext cx="11430000" cy="731520"/>
           </a:xfrm>
           <a:prstGeom prst="rect">
             <a:avLst/>
@@ -6806,109 +8362,60 @@
           <a:p>
             <a:pPr algn="l"/>
             <a:r>
-              <a:rPr sz="1400" b="1">
+              <a:rPr sz="2800" b="1">
                 <a:solidFill>
                   <a:srgbClr val="FFFFFF"/>
                 </a:solidFill>
               </a:rPr>
-              <a:t>Architecture</a:t>
-            </a:r>
-          </a:p>
-        </p:txBody>
-      </p:sp>
-      <p:sp>
-        <p:nvSpPr>
-          <p:cNvPr id="13" name="TextBox 12"/>
-          <p:cNvSpPr txBox="1"/>
-          <p:nvPr/>
-        </p:nvSpPr>
-        <p:spPr>
-          <a:xfrm>
-            <a:off x="4261104" y="1920240"/>
-            <a:ext cx="3474720" cy="3931920"/>
-          </a:xfrm>
-          <a:prstGeom prst="rect">
-            <a:avLst/>
-          </a:prstGeom>
-          <a:noFill/>
-        </p:spPr>
-        <p:txBody>
-          <a:bodyPr wrap="square">
-            <a:spAutoFit/>
-          </a:bodyPr>
-          <a:lstStyle/>
-          <a:p>
-            <a:pPr>
-              <a:spcBef>
-                <a:spcPts val="300"/>
-              </a:spcBef>
-            </a:pPr>
-            <a:r>
-              <a:rPr sz="1300">
-                <a:solidFill>
-                  <a:srgbClr val="444444"/>
-                </a:solidFill>
-              </a:rPr>
-              <a:t>• Module-level MilvusVectorStore singleton (one connection per process)</a:t>
-            </a:r>
-          </a:p>
-          <a:p>
-            <a:pPr>
-              <a:spcBef>
-                <a:spcPts val="300"/>
-              </a:spcBef>
-            </a:pPr>
-            <a:r>
-              <a:rPr sz="1300">
-                <a:solidFill>
-                  <a:srgbClr val="444444"/>
-                </a:solidFill>
-              </a:rPr>
-              <a:t>• SQLAlchemy engine as long-lived connection pool in FastAPI lifespan</a:t>
-            </a:r>
-          </a:p>
-          <a:p>
-            <a:pPr>
-              <a:spcBef>
-                <a:spcPts val="300"/>
-              </a:spcBef>
-            </a:pPr>
-            <a:r>
-              <a:rPr sz="1300">
-                <a:solidFill>
-                  <a:srgbClr val="444444"/>
-                </a:solidFill>
-              </a:rPr>
-              <a:t>• Switch reservation extraction to LLM .with_structured_output()</a:t>
-            </a:r>
-          </a:p>
-          <a:p>
-            <a:pPr>
-              <a:spcBef>
-                <a:spcPts val="300"/>
-              </a:spcBef>
-            </a:pPr>
-            <a:r>
-              <a:rPr sz="1300">
-                <a:solidFill>
-                  <a:srgbClr val="444444"/>
-                </a:solidFill>
-              </a:rPr>
-              <a:t>• Store retrieved_chunks as plain dicts (JSON-serialisable for checkpointing)</a:t>
-            </a:r>
-          </a:p>
-        </p:txBody>
-      </p:sp>
-      <p:sp>
-        <p:nvSpPr>
-          <p:cNvPr id="14" name="Rectangle 13"/>
+              <a:t>Stage 3 — Demo Walkthrough</a:t>
+            </a:r>
+          </a:p>
+        </p:txBody>
+      </p:sp>
+      <p:sp>
+        <p:nvSpPr>
+          <p:cNvPr id="5" name="TextBox 4"/>
+          <p:cNvSpPr txBox="1"/>
+          <p:nvPr/>
+        </p:nvSpPr>
+        <p:spPr>
+          <a:xfrm>
+            <a:off x="365760" y="777240"/>
+            <a:ext cx="11430000" cy="411480"/>
+          </a:xfrm>
+          <a:prstGeom prst="rect">
+            <a:avLst/>
+          </a:prstGeom>
+          <a:noFill/>
+        </p:spPr>
+        <p:txBody>
+          <a:bodyPr wrap="square">
+            <a:spAutoFit/>
+          </a:bodyPr>
+          <a:lstStyle/>
+          <a:p>
+            <a:pPr algn="l"/>
+            <a:r>
+              <a:rPr sz="1400" b="0">
+                <a:solidFill>
+                  <a:srgbClr val="B0C8E0"/>
+                </a:solidFill>
+              </a:rPr>
+              <a:t>End-to-end: submit → email → approve → notified</a:t>
+            </a:r>
+          </a:p>
+        </p:txBody>
+      </p:sp>
+      <p:sp>
+        <p:nvSpPr>
+          <p:cNvPr id="6" name="Rectangle 5"/>
           <p:cNvSpPr/>
           <p:nvPr/>
         </p:nvSpPr>
         <p:spPr>
           <a:xfrm>
-            <a:off x="8065008" y="1417320"/>
-            <a:ext cx="3657600" cy="4572000"/>
+            <a:off x="274320" y="1417320"/>
+            <a:ext cx="2743200" cy="3931920"/>
           </a:xfrm>
           <a:prstGeom prst="rect">
             <a:avLst/>
@@ -6939,20 +8446,19 @@
           <a:lstStyle/>
           <a:p>
             <a:pPr algn="ctr"/>
-            <a:endParaRPr/>
-          </a:p>
-        </p:txBody>
-      </p:sp>
-      <p:sp>
-        <p:nvSpPr>
-          <p:cNvPr id="15" name="Rectangle 14"/>
+          </a:p>
+        </p:txBody>
+      </p:sp>
+      <p:sp>
+        <p:nvSpPr>
+          <p:cNvPr id="7" name="Rectangle 6"/>
           <p:cNvSpPr/>
           <p:nvPr/>
         </p:nvSpPr>
         <p:spPr>
           <a:xfrm>
-            <a:off x="8065008" y="1417320"/>
-            <a:ext cx="3657600" cy="411480"/>
+            <a:off x="274320" y="1417320"/>
+            <a:ext cx="2743200" cy="411480"/>
           </a:xfrm>
           <a:prstGeom prst="rect">
             <a:avLst/>
@@ -6983,20 +8489,19 @@
           <a:lstStyle/>
           <a:p>
             <a:pPr algn="ctr"/>
-            <a:endParaRPr/>
-          </a:p>
-        </p:txBody>
-      </p:sp>
-      <p:sp>
-        <p:nvSpPr>
-          <p:cNvPr id="16" name="TextBox 15"/>
-          <p:cNvSpPr txBox="1"/>
-          <p:nvPr/>
-        </p:nvSpPr>
-        <p:spPr>
-          <a:xfrm>
-            <a:off x="8156448" y="1444752"/>
-            <a:ext cx="3474720" cy="347472"/>
+          </a:p>
+        </p:txBody>
+      </p:sp>
+      <p:sp>
+        <p:nvSpPr>
+          <p:cNvPr id="8" name="TextBox 7"/>
+          <p:cNvSpPr txBox="1"/>
+          <p:nvPr/>
+        </p:nvSpPr>
+        <p:spPr>
+          <a:xfrm>
+            <a:off x="365760" y="1444752"/>
+            <a:ext cx="2560320" cy="347472"/>
           </a:xfrm>
           <a:prstGeom prst="rect">
             <a:avLst/>
@@ -7011,26 +8516,26 @@
           <a:p>
             <a:pPr algn="l"/>
             <a:r>
-              <a:rPr sz="1400" b="1">
+              <a:rPr sz="1200" b="1">
                 <a:solidFill>
                   <a:srgbClr val="FFFFFF"/>
                 </a:solidFill>
               </a:rPr>
-              <a:t>Operational</a:t>
-            </a:r>
-          </a:p>
-        </p:txBody>
-      </p:sp>
-      <p:sp>
-        <p:nvSpPr>
-          <p:cNvPr id="17" name="TextBox 16"/>
-          <p:cNvSpPr txBox="1"/>
-          <p:nvPr/>
-        </p:nvSpPr>
-        <p:spPr>
-          <a:xfrm>
-            <a:off x="8156448" y="1920240"/>
-            <a:ext cx="3474720" cy="3931920"/>
+              <a:t>1  Submit reservation</a:t>
+            </a:r>
+          </a:p>
+        </p:txBody>
+      </p:sp>
+      <p:sp>
+        <p:nvSpPr>
+          <p:cNvPr id="9" name="TextBox 8"/>
+          <p:cNvSpPr txBox="1"/>
+          <p:nvPr/>
+        </p:nvSpPr>
+        <p:spPr>
+          <a:xfrm>
+            <a:off x="365760" y="1920240"/>
+            <a:ext cx="2560320" cy="3291840"/>
           </a:xfrm>
           <a:prstGeom prst="rect">
             <a:avLst/>
@@ -7054,7 +8559,7 @@
                   <a:srgbClr val="444444"/>
                 </a:solidFill>
               </a:rPr>
-              <a:t>• Request-level INFO log: session_id · intent · latency per request</a:t>
+              <a:t>• User provides all reservation fields in chat</a:t>
             </a:r>
           </a:p>
           <a:p>
@@ -7069,7 +8574,7 @@
                   <a:srgbClr val="444444"/>
                 </a:solidFill>
               </a:rPr>
-              <a:t>• Force error if ADMIN_TOKEN == 'change-me' in production config</a:t>
+              <a:t>• approval_request_node creates ApprovalRequest (UUID)</a:t>
             </a:r>
           </a:p>
           <a:p>
@@ -7084,7 +8589,7 @@
                   <a:srgbClr val="444444"/>
                 </a:solidFill>
               </a:rPr>
-              <a:t>• Alembic migrations replacing create_all for production schema management</a:t>
+              <a:t>• SMTP email sent to admin via smtplib / MailHog</a:t>
             </a:r>
           </a:p>
           <a:p>
@@ -7099,6 +8604,1643 @@
                   <a:srgbClr val="444444"/>
                 </a:solidFill>
               </a:rPr>
+              <a:t>• Bot replies: 'Your request is awaiting approval'</a:t>
+            </a:r>
+          </a:p>
+        </p:txBody>
+      </p:sp>
+      <p:sp>
+        <p:nvSpPr>
+          <p:cNvPr id="10" name="TextBox 9"/>
+          <p:cNvSpPr txBox="1"/>
+          <p:nvPr/>
+        </p:nvSpPr>
+        <p:spPr>
+          <a:xfrm>
+            <a:off x="3017520" y="2560320"/>
+            <a:ext cx="256032" cy="457200"/>
+          </a:xfrm>
+          <a:prstGeom prst="rect">
+            <a:avLst/>
+          </a:prstGeom>
+          <a:noFill/>
+        </p:spPr>
+        <p:txBody>
+          <a:bodyPr wrap="square">
+            <a:spAutoFit/>
+          </a:bodyPr>
+          <a:lstStyle/>
+          <a:p>
+            <a:pPr algn="ctr"/>
+            <a:r>
+              <a:rPr sz="2200" b="1">
+                <a:solidFill>
+                  <a:srgbClr val="444444"/>
+                </a:solidFill>
+              </a:rPr>
+              <a:t>→</a:t>
+            </a:r>
+          </a:p>
+        </p:txBody>
+      </p:sp>
+      <p:sp>
+        <p:nvSpPr>
+          <p:cNvPr id="11" name="Rectangle 10"/>
+          <p:cNvSpPr/>
+          <p:nvPr/>
+        </p:nvSpPr>
+        <p:spPr>
+          <a:xfrm>
+            <a:off x="3236976" y="1417320"/>
+            <a:ext cx="2743200" cy="3931920"/>
+          </a:xfrm>
+          <a:prstGeom prst="rect">
+            <a:avLst/>
+          </a:prstGeom>
+          <a:solidFill>
+            <a:srgbClr val="FFFFFF"/>
+          </a:solidFill>
+          <a:ln>
+            <a:noFill/>
+          </a:ln>
+        </p:spPr>
+        <p:style>
+          <a:lnRef idx="1">
+            <a:schemeClr val="accent1"/>
+          </a:lnRef>
+          <a:fillRef idx="3">
+            <a:schemeClr val="accent1"/>
+          </a:fillRef>
+          <a:effectRef idx="2">
+            <a:schemeClr val="accent1"/>
+          </a:effectRef>
+          <a:fontRef idx="minor">
+            <a:schemeClr val="lt1"/>
+          </a:fontRef>
+        </p:style>
+        <p:txBody>
+          <a:bodyPr rtlCol="0" anchor="ctr"/>
+          <a:lstStyle/>
+          <a:p>
+            <a:pPr algn="ctr"/>
+          </a:p>
+        </p:txBody>
+      </p:sp>
+      <p:sp>
+        <p:nvSpPr>
+          <p:cNvPr id="12" name="Rectangle 11"/>
+          <p:cNvSpPr/>
+          <p:nvPr/>
+        </p:nvSpPr>
+        <p:spPr>
+          <a:xfrm>
+            <a:off x="3236976" y="1417320"/>
+            <a:ext cx="2743200" cy="411480"/>
+          </a:xfrm>
+          <a:prstGeom prst="rect">
+            <a:avLst/>
+          </a:prstGeom>
+          <a:solidFill>
+            <a:srgbClr val="1A376C"/>
+          </a:solidFill>
+          <a:ln>
+            <a:noFill/>
+          </a:ln>
+        </p:spPr>
+        <p:style>
+          <a:lnRef idx="1">
+            <a:schemeClr val="accent1"/>
+          </a:lnRef>
+          <a:fillRef idx="3">
+            <a:schemeClr val="accent1"/>
+          </a:fillRef>
+          <a:effectRef idx="2">
+            <a:schemeClr val="accent1"/>
+          </a:effectRef>
+          <a:fontRef idx="minor">
+            <a:schemeClr val="lt1"/>
+          </a:fontRef>
+        </p:style>
+        <p:txBody>
+          <a:bodyPr rtlCol="0" anchor="ctr"/>
+          <a:lstStyle/>
+          <a:p>
+            <a:pPr algn="ctr"/>
+          </a:p>
+        </p:txBody>
+      </p:sp>
+      <p:sp>
+        <p:nvSpPr>
+          <p:cNvPr id="13" name="TextBox 12"/>
+          <p:cNvSpPr txBox="1"/>
+          <p:nvPr/>
+        </p:nvSpPr>
+        <p:spPr>
+          <a:xfrm>
+            <a:off x="3328416" y="1444752"/>
+            <a:ext cx="2560320" cy="347472"/>
+          </a:xfrm>
+          <a:prstGeom prst="rect">
+            <a:avLst/>
+          </a:prstGeom>
+          <a:noFill/>
+        </p:spPr>
+        <p:txBody>
+          <a:bodyPr wrap="square">
+            <a:spAutoFit/>
+          </a:bodyPr>
+          <a:lstStyle/>
+          <a:p>
+            <a:pPr algn="l"/>
+            <a:r>
+              <a:rPr sz="1200" b="1">
+                <a:solidFill>
+                  <a:srgbClr val="FFFFFF"/>
+                </a:solidFill>
+              </a:rPr>
+              <a:t>2  Admin receives email</a:t>
+            </a:r>
+          </a:p>
+        </p:txBody>
+      </p:sp>
+      <p:sp>
+        <p:nvSpPr>
+          <p:cNvPr id="14" name="TextBox 13"/>
+          <p:cNvSpPr txBox="1"/>
+          <p:nvPr/>
+        </p:nvSpPr>
+        <p:spPr>
+          <a:xfrm>
+            <a:off x="3328416" y="1920240"/>
+            <a:ext cx="2560320" cy="3291840"/>
+          </a:xfrm>
+          <a:prstGeom prst="rect">
+            <a:avLst/>
+          </a:prstGeom>
+          <a:noFill/>
+        </p:spPr>
+        <p:txBody>
+          <a:bodyPr wrap="square">
+            <a:spAutoFit/>
+          </a:bodyPr>
+          <a:lstStyle/>
+          <a:p>
+            <a:pPr>
+              <a:spcBef>
+                <a:spcPts val="300"/>
+              </a:spcBef>
+            </a:pPr>
+            <a:r>
+              <a:rPr sz="1300">
+                <a:solidFill>
+                  <a:srgbClr val="444444"/>
+                </a:solidFill>
+              </a:rPr>
+              <a:t>• Email subject: [Parking Reservation] New request from {name} — {id}</a:t>
+            </a:r>
+          </a:p>
+          <a:p>
+            <a:pPr>
+              <a:spcBef>
+                <a:spcPts val="300"/>
+              </a:spcBef>
+            </a:pPr>
+            <a:r>
+              <a:rPr sz="1300">
+                <a:solidFill>
+                  <a:srgbClr val="444444"/>
+                </a:solidFill>
+              </a:rPr>
+              <a:t>• Body contains: name, plate, dates</a:t>
+            </a:r>
+          </a:p>
+          <a:p>
+            <a:pPr>
+              <a:spcBef>
+                <a:spcPts val="300"/>
+              </a:spcBef>
+            </a:pPr>
+            <a:r>
+              <a:rPr sz="1300">
+                <a:solidFill>
+                  <a:srgbClr val="444444"/>
+                </a:solidFill>
+              </a:rPr>
+              <a:t>• Two curl commands: approve or reject</a:t>
+            </a:r>
+          </a:p>
+          <a:p>
+            <a:pPr>
+              <a:spcBef>
+                <a:spcPts val="300"/>
+              </a:spcBef>
+            </a:pPr>
+            <a:r>
+              <a:rPr sz="1300">
+                <a:solidFill>
+                  <a:srgbClr val="444444"/>
+                </a:solidFill>
+              </a:rPr>
+              <a:t>• MailHog web UI: http://localhost:8025</a:t>
+            </a:r>
+          </a:p>
+        </p:txBody>
+      </p:sp>
+      <p:sp>
+        <p:nvSpPr>
+          <p:cNvPr id="15" name="TextBox 14"/>
+          <p:cNvSpPr txBox="1"/>
+          <p:nvPr/>
+        </p:nvSpPr>
+        <p:spPr>
+          <a:xfrm>
+            <a:off x="5980176" y="2560320"/>
+            <a:ext cx="256032" cy="457200"/>
+          </a:xfrm>
+          <a:prstGeom prst="rect">
+            <a:avLst/>
+          </a:prstGeom>
+          <a:noFill/>
+        </p:spPr>
+        <p:txBody>
+          <a:bodyPr wrap="square">
+            <a:spAutoFit/>
+          </a:bodyPr>
+          <a:lstStyle/>
+          <a:p>
+            <a:pPr algn="ctr"/>
+            <a:r>
+              <a:rPr sz="2200" b="1">
+                <a:solidFill>
+                  <a:srgbClr val="444444"/>
+                </a:solidFill>
+              </a:rPr>
+              <a:t>→</a:t>
+            </a:r>
+          </a:p>
+        </p:txBody>
+      </p:sp>
+      <p:sp>
+        <p:nvSpPr>
+          <p:cNvPr id="16" name="Rectangle 15"/>
+          <p:cNvSpPr/>
+          <p:nvPr/>
+        </p:nvSpPr>
+        <p:spPr>
+          <a:xfrm>
+            <a:off x="6199632" y="1417320"/>
+            <a:ext cx="2743200" cy="3931920"/>
+          </a:xfrm>
+          <a:prstGeom prst="rect">
+            <a:avLst/>
+          </a:prstGeom>
+          <a:solidFill>
+            <a:srgbClr val="FFFFFF"/>
+          </a:solidFill>
+          <a:ln>
+            <a:noFill/>
+          </a:ln>
+        </p:spPr>
+        <p:style>
+          <a:lnRef idx="1">
+            <a:schemeClr val="accent1"/>
+          </a:lnRef>
+          <a:fillRef idx="3">
+            <a:schemeClr val="accent1"/>
+          </a:fillRef>
+          <a:effectRef idx="2">
+            <a:schemeClr val="accent1"/>
+          </a:effectRef>
+          <a:fontRef idx="minor">
+            <a:schemeClr val="lt1"/>
+          </a:fontRef>
+        </p:style>
+        <p:txBody>
+          <a:bodyPr rtlCol="0" anchor="ctr"/>
+          <a:lstStyle/>
+          <a:p>
+            <a:pPr algn="ctr"/>
+          </a:p>
+        </p:txBody>
+      </p:sp>
+      <p:sp>
+        <p:nvSpPr>
+          <p:cNvPr id="17" name="Rectangle 16"/>
+          <p:cNvSpPr/>
+          <p:nvPr/>
+        </p:nvSpPr>
+        <p:spPr>
+          <a:xfrm>
+            <a:off x="6199632" y="1417320"/>
+            <a:ext cx="2743200" cy="411480"/>
+          </a:xfrm>
+          <a:prstGeom prst="rect">
+            <a:avLst/>
+          </a:prstGeom>
+          <a:solidFill>
+            <a:srgbClr val="F57C00"/>
+          </a:solidFill>
+          <a:ln>
+            <a:noFill/>
+          </a:ln>
+        </p:spPr>
+        <p:style>
+          <a:lnRef idx="1">
+            <a:schemeClr val="accent1"/>
+          </a:lnRef>
+          <a:fillRef idx="3">
+            <a:schemeClr val="accent1"/>
+          </a:fillRef>
+          <a:effectRef idx="2">
+            <a:schemeClr val="accent1"/>
+          </a:effectRef>
+          <a:fontRef idx="minor">
+            <a:schemeClr val="lt1"/>
+          </a:fontRef>
+        </p:style>
+        <p:txBody>
+          <a:bodyPr rtlCol="0" anchor="ctr"/>
+          <a:lstStyle/>
+          <a:p>
+            <a:pPr algn="ctr"/>
+          </a:p>
+        </p:txBody>
+      </p:sp>
+      <p:sp>
+        <p:nvSpPr>
+          <p:cNvPr id="18" name="TextBox 17"/>
+          <p:cNvSpPr txBox="1"/>
+          <p:nvPr/>
+        </p:nvSpPr>
+        <p:spPr>
+          <a:xfrm>
+            <a:off x="6291072" y="1444752"/>
+            <a:ext cx="2560320" cy="347472"/>
+          </a:xfrm>
+          <a:prstGeom prst="rect">
+            <a:avLst/>
+          </a:prstGeom>
+          <a:noFill/>
+        </p:spPr>
+        <p:txBody>
+          <a:bodyPr wrap="square">
+            <a:spAutoFit/>
+          </a:bodyPr>
+          <a:lstStyle/>
+          <a:p>
+            <a:pPr algn="l"/>
+            <a:r>
+              <a:rPr sz="1200" b="1">
+                <a:solidFill>
+                  <a:srgbClr val="FFFFFF"/>
+                </a:solidFill>
+              </a:rPr>
+              <a:t>3  Admin decides (curl)</a:t>
+            </a:r>
+          </a:p>
+        </p:txBody>
+      </p:sp>
+      <p:sp>
+        <p:nvSpPr>
+          <p:cNvPr id="19" name="TextBox 18"/>
+          <p:cNvSpPr txBox="1"/>
+          <p:nvPr/>
+        </p:nvSpPr>
+        <p:spPr>
+          <a:xfrm>
+            <a:off x="6291072" y="1920240"/>
+            <a:ext cx="2560320" cy="3291840"/>
+          </a:xfrm>
+          <a:prstGeom prst="rect">
+            <a:avLst/>
+          </a:prstGeom>
+          <a:noFill/>
+        </p:spPr>
+        <p:txBody>
+          <a:bodyPr wrap="square">
+            <a:spAutoFit/>
+          </a:bodyPr>
+          <a:lstStyle/>
+          <a:p>
+            <a:pPr>
+              <a:spcBef>
+                <a:spcPts val="300"/>
+              </a:spcBef>
+            </a:pPr>
+            <a:r>
+              <a:rPr sz="1300">
+                <a:solidFill>
+                  <a:srgbClr val="444444"/>
+                </a:solidFill>
+              </a:rPr>
+              <a:t>• curl -X POST .../approve  -H 'Authorization: Bearer &lt;token&gt;'</a:t>
+            </a:r>
+          </a:p>
+          <a:p>
+            <a:pPr>
+              <a:spcBef>
+                <a:spcPts val="300"/>
+              </a:spcBef>
+            </a:pPr>
+            <a:r>
+              <a:rPr sz="1300">
+                <a:solidFill>
+                  <a:srgbClr val="444444"/>
+                </a:solidFill>
+              </a:rPr>
+              <a:t>• Or: .../reject  -d '{"reason": "No spaces"}'</a:t>
+            </a:r>
+          </a:p>
+          <a:p>
+            <a:pPr>
+              <a:spcBef>
+                <a:spcPts val="300"/>
+              </a:spcBef>
+            </a:pPr>
+            <a:r>
+              <a:rPr sz="1300">
+                <a:solidFill>
+                  <a:srgbClr val="444444"/>
+                </a:solidFill>
+              </a:rPr>
+              <a:t>• Decision stored in PendingStore in-process</a:t>
+            </a:r>
+          </a:p>
+          <a:p>
+            <a:pPr>
+              <a:spcBef>
+                <a:spcPts val="300"/>
+              </a:spcBef>
+            </a:pPr>
+            <a:r>
+              <a:rPr sz="1300">
+                <a:solidFill>
+                  <a:srgbClr val="444444"/>
+                </a:solidFill>
+              </a:rPr>
+              <a:t>• Returns 204 on success · 409 if already decided</a:t>
+            </a:r>
+          </a:p>
+        </p:txBody>
+      </p:sp>
+      <p:sp>
+        <p:nvSpPr>
+          <p:cNvPr id="20" name="TextBox 19"/>
+          <p:cNvSpPr txBox="1"/>
+          <p:nvPr/>
+        </p:nvSpPr>
+        <p:spPr>
+          <a:xfrm>
+            <a:off x="8942832" y="2560320"/>
+            <a:ext cx="256032" cy="457200"/>
+          </a:xfrm>
+          <a:prstGeom prst="rect">
+            <a:avLst/>
+          </a:prstGeom>
+          <a:noFill/>
+        </p:spPr>
+        <p:txBody>
+          <a:bodyPr wrap="square">
+            <a:spAutoFit/>
+          </a:bodyPr>
+          <a:lstStyle/>
+          <a:p>
+            <a:pPr algn="ctr"/>
+            <a:r>
+              <a:rPr sz="2200" b="1">
+                <a:solidFill>
+                  <a:srgbClr val="444444"/>
+                </a:solidFill>
+              </a:rPr>
+              <a:t>→</a:t>
+            </a:r>
+          </a:p>
+        </p:txBody>
+      </p:sp>
+      <p:sp>
+        <p:nvSpPr>
+          <p:cNvPr id="21" name="Rectangle 20"/>
+          <p:cNvSpPr/>
+          <p:nvPr/>
+        </p:nvSpPr>
+        <p:spPr>
+          <a:xfrm>
+            <a:off x="9162288" y="1417320"/>
+            <a:ext cx="2743200" cy="3931920"/>
+          </a:xfrm>
+          <a:prstGeom prst="rect">
+            <a:avLst/>
+          </a:prstGeom>
+          <a:solidFill>
+            <a:srgbClr val="FFFFFF"/>
+          </a:solidFill>
+          <a:ln>
+            <a:noFill/>
+          </a:ln>
+        </p:spPr>
+        <p:style>
+          <a:lnRef idx="1">
+            <a:schemeClr val="accent1"/>
+          </a:lnRef>
+          <a:fillRef idx="3">
+            <a:schemeClr val="accent1"/>
+          </a:fillRef>
+          <a:effectRef idx="2">
+            <a:schemeClr val="accent1"/>
+          </a:effectRef>
+          <a:fontRef idx="minor">
+            <a:schemeClr val="lt1"/>
+          </a:fontRef>
+        </p:style>
+        <p:txBody>
+          <a:bodyPr rtlCol="0" anchor="ctr"/>
+          <a:lstStyle/>
+          <a:p>
+            <a:pPr algn="ctr"/>
+          </a:p>
+        </p:txBody>
+      </p:sp>
+      <p:sp>
+        <p:nvSpPr>
+          <p:cNvPr id="22" name="Rectangle 21"/>
+          <p:cNvSpPr/>
+          <p:nvPr/>
+        </p:nvSpPr>
+        <p:spPr>
+          <a:xfrm>
+            <a:off x="9162288" y="1417320"/>
+            <a:ext cx="2743200" cy="411480"/>
+          </a:xfrm>
+          <a:prstGeom prst="rect">
+            <a:avLst/>
+          </a:prstGeom>
+          <a:solidFill>
+            <a:srgbClr val="2E7D32"/>
+          </a:solidFill>
+          <a:ln>
+            <a:noFill/>
+          </a:ln>
+        </p:spPr>
+        <p:style>
+          <a:lnRef idx="1">
+            <a:schemeClr val="accent1"/>
+          </a:lnRef>
+          <a:fillRef idx="3">
+            <a:schemeClr val="accent1"/>
+          </a:fillRef>
+          <a:effectRef idx="2">
+            <a:schemeClr val="accent1"/>
+          </a:effectRef>
+          <a:fontRef idx="minor">
+            <a:schemeClr val="lt1"/>
+          </a:fontRef>
+        </p:style>
+        <p:txBody>
+          <a:bodyPr rtlCol="0" anchor="ctr"/>
+          <a:lstStyle/>
+          <a:p>
+            <a:pPr algn="ctr"/>
+          </a:p>
+        </p:txBody>
+      </p:sp>
+      <p:sp>
+        <p:nvSpPr>
+          <p:cNvPr id="23" name="TextBox 22"/>
+          <p:cNvSpPr txBox="1"/>
+          <p:nvPr/>
+        </p:nvSpPr>
+        <p:spPr>
+          <a:xfrm>
+            <a:off x="9253728" y="1444752"/>
+            <a:ext cx="2560320" cy="347472"/>
+          </a:xfrm>
+          <a:prstGeom prst="rect">
+            <a:avLst/>
+          </a:prstGeom>
+          <a:noFill/>
+        </p:spPr>
+        <p:txBody>
+          <a:bodyPr wrap="square">
+            <a:spAutoFit/>
+          </a:bodyPr>
+          <a:lstStyle/>
+          <a:p>
+            <a:pPr algn="l"/>
+            <a:r>
+              <a:rPr sz="1200" b="1">
+                <a:solidFill>
+                  <a:srgbClr val="FFFFFF"/>
+                </a:solidFill>
+              </a:rPr>
+              <a:t>4  User notified</a:t>
+            </a:r>
+          </a:p>
+        </p:txBody>
+      </p:sp>
+      <p:sp>
+        <p:nvSpPr>
+          <p:cNvPr id="24" name="TextBox 23"/>
+          <p:cNvSpPr txBox="1"/>
+          <p:nvPr/>
+        </p:nvSpPr>
+        <p:spPr>
+          <a:xfrm>
+            <a:off x="9253728" y="1920240"/>
+            <a:ext cx="2560320" cy="3291840"/>
+          </a:xfrm>
+          <a:prstGeom prst="rect">
+            <a:avLst/>
+          </a:prstGeom>
+          <a:noFill/>
+        </p:spPr>
+        <p:txBody>
+          <a:bodyPr wrap="square">
+            <a:spAutoFit/>
+          </a:bodyPr>
+          <a:lstStyle/>
+          <a:p>
+            <a:pPr>
+              <a:spcBef>
+                <a:spcPts val="300"/>
+              </a:spcBef>
+            </a:pPr>
+            <a:r>
+              <a:rPr sz="1300">
+                <a:solidFill>
+                  <a:srgbClr val="444444"/>
+                </a:solidFill>
+              </a:rPr>
+              <a:t>• User sends any next message</a:t>
+            </a:r>
+          </a:p>
+          <a:p>
+            <a:pPr>
+              <a:spcBef>
+                <a:spcPts val="300"/>
+              </a:spcBef>
+            </a:pPr>
+            <a:r>
+              <a:rPr sz="1300">
+                <a:solidFill>
+                  <a:srgbClr val="444444"/>
+                </a:solidFill>
+              </a:rPr>
+              <a:t>• pending_check_node detects decision</a:t>
+            </a:r>
+          </a:p>
+          <a:p>
+            <a:pPr>
+              <a:spcBef>
+                <a:spcPts val="300"/>
+              </a:spcBef>
+            </a:pPr>
+            <a:r>
+              <a:rPr sz="1300">
+                <a:solidFill>
+                  <a:srgbClr val="444444"/>
+                </a:solidFill>
+              </a:rPr>
+              <a:t>• Approved: ✅ confirmation with details</a:t>
+            </a:r>
+          </a:p>
+          <a:p>
+            <a:pPr>
+              <a:spcBef>
+                <a:spcPts val="300"/>
+              </a:spcBef>
+            </a:pPr>
+            <a:r>
+              <a:rPr sz="1300">
+                <a:solidFill>
+                  <a:srgbClr val="444444"/>
+                </a:solidFill>
+              </a:rPr>
+              <a:t>• Rejected: ❌ message + reason (if given)</a:t>
+            </a:r>
+          </a:p>
+        </p:txBody>
+      </p:sp>
+      <p:sp>
+        <p:nvSpPr>
+          <p:cNvPr id="25" name="Rectangle 24"/>
+          <p:cNvSpPr/>
+          <p:nvPr/>
+        </p:nvSpPr>
+        <p:spPr>
+          <a:xfrm>
+            <a:off x="274320" y="5486400"/>
+            <a:ext cx="11612880" cy="502920"/>
+          </a:xfrm>
+          <a:prstGeom prst="rect">
+            <a:avLst/>
+          </a:prstGeom>
+          <a:solidFill>
+            <a:srgbClr val="FFFFFF"/>
+          </a:solidFill>
+          <a:ln>
+            <a:noFill/>
+          </a:ln>
+        </p:spPr>
+        <p:style>
+          <a:lnRef idx="1">
+            <a:schemeClr val="accent1"/>
+          </a:lnRef>
+          <a:fillRef idx="3">
+            <a:schemeClr val="accent1"/>
+          </a:fillRef>
+          <a:effectRef idx="2">
+            <a:schemeClr val="accent1"/>
+          </a:effectRef>
+          <a:fontRef idx="minor">
+            <a:schemeClr val="lt1"/>
+          </a:fontRef>
+        </p:style>
+        <p:txBody>
+          <a:bodyPr rtlCol="0" anchor="ctr"/>
+          <a:lstStyle/>
+          <a:p>
+            <a:pPr algn="ctr"/>
+          </a:p>
+        </p:txBody>
+      </p:sp>
+      <p:sp>
+        <p:nvSpPr>
+          <p:cNvPr id="26" name="TextBox 25"/>
+          <p:cNvSpPr txBox="1"/>
+          <p:nvPr/>
+        </p:nvSpPr>
+        <p:spPr>
+          <a:xfrm>
+            <a:off x="365760" y="5532120"/>
+            <a:ext cx="11430000" cy="457200"/>
+          </a:xfrm>
+          <a:prstGeom prst="rect">
+            <a:avLst/>
+          </a:prstGeom>
+          <a:noFill/>
+        </p:spPr>
+        <p:txBody>
+          <a:bodyPr wrap="square">
+            <a:spAutoFit/>
+          </a:bodyPr>
+          <a:lstStyle/>
+          <a:p>
+            <a:pPr>
+              <a:spcBef>
+                <a:spcPts val="300"/>
+              </a:spcBef>
+            </a:pPr>
+            <a:r>
+              <a:rPr sz="1300">
+                <a:solidFill>
+                  <a:srgbClr val="444444"/>
+                </a:solidFill>
+              </a:rPr>
+              <a:t>• 22 approval unit tests across 5 modules: models · store · notifier · service · API · nodes</a:t>
+            </a:r>
+          </a:p>
+          <a:p>
+            <a:pPr>
+              <a:spcBef>
+                <a:spcPts val="300"/>
+              </a:spcBef>
+            </a:pPr>
+            <a:r>
+              <a:rPr sz="1300">
+                <a:solidFill>
+                  <a:srgbClr val="444444"/>
+                </a:solidFill>
+              </a:rPr>
+              <a:t>• API tests use FastAPI TestClient (no real SMTP) · store tests clear module-level dicts for isolation</a:t>
+            </a:r>
+          </a:p>
+          <a:p>
+            <a:pPr>
+              <a:spcBef>
+                <a:spcPts val="300"/>
+              </a:spcBef>
+            </a:pPr>
+            <a:r>
+              <a:rPr sz="1300">
+                <a:solidFill>
+                  <a:srgbClr val="444444"/>
+                </a:solidFill>
+              </a:rPr>
+              <a:t>• pending_check_node tested for: approved, rejected+reason, expired, no-pending (normal flow continues)</a:t>
+            </a:r>
+          </a:p>
+        </p:txBody>
+      </p:sp>
+      <p:sp>
+        <p:nvSpPr>
+          <p:cNvPr id="27" name="TextBox 26"/>
+          <p:cNvSpPr txBox="1"/>
+          <p:nvPr/>
+        </p:nvSpPr>
+        <p:spPr>
+          <a:xfrm>
+            <a:off x="274320" y="6080760"/>
+            <a:ext cx="11612880" cy="274320"/>
+          </a:xfrm>
+          <a:prstGeom prst="rect">
+            <a:avLst/>
+          </a:prstGeom>
+          <a:noFill/>
+        </p:spPr>
+        <p:txBody>
+          <a:bodyPr wrap="square">
+            <a:spAutoFit/>
+          </a:bodyPr>
+          <a:lstStyle/>
+          <a:p>
+            <a:pPr algn="ctr"/>
+            <a:r>
+              <a:rPr sz="1100" b="0">
+                <a:solidFill>
+                  <a:srgbClr val="007A87"/>
+                </a:solidFill>
+              </a:rPr>
+              <a:t>Full walkthrough: specs/002-admin-approval/quickstart.md</a:t>
+            </a:r>
+          </a:p>
+        </p:txBody>
+      </p:sp>
+    </p:spTree>
+  </p:cSld>
+  <p:clrMapOvr>
+    <a:masterClrMapping/>
+  </p:clrMapOvr>
+</p:sld>
+</file>
+
+<file path=ppt/slides/slide14.xml><?xml version="1.0" encoding="utf-8"?>
+<p:sld xmlns:a="http://schemas.openxmlformats.org/drawingml/2006/main" xmlns:p="http://schemas.openxmlformats.org/presentationml/2006/main" xmlns:r="http://schemas.openxmlformats.org/officeDocument/2006/relationships">
+  <p:cSld>
+    <p:spTree>
+      <p:nvGrpSpPr>
+        <p:cNvPr id="1" name=""/>
+        <p:cNvGrpSpPr/>
+        <p:nvPr/>
+      </p:nvGrpSpPr>
+      <p:grpSpPr/>
+      <p:sp>
+        <p:nvSpPr>
+          <p:cNvPr id="2" name="Rectangle 1"/>
+          <p:cNvSpPr/>
+          <p:nvPr/>
+        </p:nvSpPr>
+        <p:spPr>
+          <a:xfrm>
+            <a:off x="0" y="0"/>
+            <a:ext cx="12188952" cy="6858000"/>
+          </a:xfrm>
+          <a:prstGeom prst="rect">
+            <a:avLst/>
+          </a:prstGeom>
+          <a:solidFill>
+            <a:srgbClr val="F4F6F8"/>
+          </a:solidFill>
+          <a:ln>
+            <a:noFill/>
+          </a:ln>
+        </p:spPr>
+        <p:style>
+          <a:lnRef idx="1">
+            <a:schemeClr val="accent1"/>
+          </a:lnRef>
+          <a:fillRef idx="3">
+            <a:schemeClr val="accent1"/>
+          </a:fillRef>
+          <a:effectRef idx="2">
+            <a:schemeClr val="accent1"/>
+          </a:effectRef>
+          <a:fontRef idx="minor">
+            <a:schemeClr val="lt1"/>
+          </a:fontRef>
+        </p:style>
+        <p:txBody>
+          <a:bodyPr rtlCol="0" anchor="ctr"/>
+          <a:lstStyle/>
+          <a:p>
+            <a:pPr algn="ctr"/>
+          </a:p>
+        </p:txBody>
+      </p:sp>
+      <p:sp>
+        <p:nvSpPr>
+          <p:cNvPr id="3" name="Rectangle 2"/>
+          <p:cNvSpPr/>
+          <p:nvPr/>
+        </p:nvSpPr>
+        <p:spPr>
+          <a:xfrm>
+            <a:off x="0" y="0"/>
+            <a:ext cx="12188952" cy="1280160"/>
+          </a:xfrm>
+          <a:prstGeom prst="rect">
+            <a:avLst/>
+          </a:prstGeom>
+          <a:solidFill>
+            <a:srgbClr val="1A376C"/>
+          </a:solidFill>
+          <a:ln>
+            <a:noFill/>
+          </a:ln>
+        </p:spPr>
+        <p:style>
+          <a:lnRef idx="1">
+            <a:schemeClr val="accent1"/>
+          </a:lnRef>
+          <a:fillRef idx="3">
+            <a:schemeClr val="accent1"/>
+          </a:fillRef>
+          <a:effectRef idx="2">
+            <a:schemeClr val="accent1"/>
+          </a:effectRef>
+          <a:fontRef idx="minor">
+            <a:schemeClr val="lt1"/>
+          </a:fontRef>
+        </p:style>
+        <p:txBody>
+          <a:bodyPr rtlCol="0" anchor="ctr"/>
+          <a:lstStyle/>
+          <a:p>
+            <a:pPr algn="ctr"/>
+          </a:p>
+        </p:txBody>
+      </p:sp>
+      <p:sp>
+        <p:nvSpPr>
+          <p:cNvPr id="4" name="TextBox 3"/>
+          <p:cNvSpPr txBox="1"/>
+          <p:nvPr/>
+        </p:nvSpPr>
+        <p:spPr>
+          <a:xfrm>
+            <a:off x="365760" y="137160"/>
+            <a:ext cx="11430000" cy="731520"/>
+          </a:xfrm>
+          <a:prstGeom prst="rect">
+            <a:avLst/>
+          </a:prstGeom>
+          <a:noFill/>
+        </p:spPr>
+        <p:txBody>
+          <a:bodyPr wrap="square">
+            <a:spAutoFit/>
+          </a:bodyPr>
+          <a:lstStyle/>
+          <a:p>
+            <a:pPr algn="l"/>
+            <a:r>
+              <a:rPr sz="2800" b="1">
+                <a:solidFill>
+                  <a:srgbClr val="FFFFFF"/>
+                </a:solidFill>
+              </a:rPr>
+              <a:t>What's Next — Stage 2 &amp; 4 Roadmap</a:t>
+            </a:r>
+          </a:p>
+        </p:txBody>
+      </p:sp>
+      <p:sp>
+        <p:nvSpPr>
+          <p:cNvPr id="5" name="TextBox 4"/>
+          <p:cNvSpPr txBox="1"/>
+          <p:nvPr/>
+        </p:nvSpPr>
+        <p:spPr>
+          <a:xfrm>
+            <a:off x="365760" y="777240"/>
+            <a:ext cx="11430000" cy="411480"/>
+          </a:xfrm>
+          <a:prstGeom prst="rect">
+            <a:avLst/>
+          </a:prstGeom>
+          <a:noFill/>
+        </p:spPr>
+        <p:txBody>
+          <a:bodyPr wrap="square">
+            <a:spAutoFit/>
+          </a:bodyPr>
+          <a:lstStyle/>
+          <a:p>
+            <a:pPr algn="l"/>
+            <a:r>
+              <a:rPr sz="1400" b="0">
+                <a:solidFill>
+                  <a:srgbClr val="B0C8E0"/>
+                </a:solidFill>
+              </a:rPr>
+              <a:t>Known gaps and planned improvements</a:t>
+            </a:r>
+          </a:p>
+        </p:txBody>
+      </p:sp>
+      <p:sp>
+        <p:nvSpPr>
+          <p:cNvPr id="6" name="Rectangle 5"/>
+          <p:cNvSpPr/>
+          <p:nvPr/>
+        </p:nvSpPr>
+        <p:spPr>
+          <a:xfrm>
+            <a:off x="274320" y="1417320"/>
+            <a:ext cx="3657600" cy="4572000"/>
+          </a:xfrm>
+          <a:prstGeom prst="rect">
+            <a:avLst/>
+          </a:prstGeom>
+          <a:solidFill>
+            <a:srgbClr val="FFFFFF"/>
+          </a:solidFill>
+          <a:ln>
+            <a:noFill/>
+          </a:ln>
+        </p:spPr>
+        <p:style>
+          <a:lnRef idx="1">
+            <a:schemeClr val="accent1"/>
+          </a:lnRef>
+          <a:fillRef idx="3">
+            <a:schemeClr val="accent1"/>
+          </a:fillRef>
+          <a:effectRef idx="2">
+            <a:schemeClr val="accent1"/>
+          </a:effectRef>
+          <a:fontRef idx="minor">
+            <a:schemeClr val="lt1"/>
+          </a:fontRef>
+        </p:style>
+        <p:txBody>
+          <a:bodyPr rtlCol="0" anchor="ctr"/>
+          <a:lstStyle/>
+          <a:p>
+            <a:pPr algn="ctr"/>
+          </a:p>
+        </p:txBody>
+      </p:sp>
+      <p:sp>
+        <p:nvSpPr>
+          <p:cNvPr id="7" name="Rectangle 6"/>
+          <p:cNvSpPr/>
+          <p:nvPr/>
+        </p:nvSpPr>
+        <p:spPr>
+          <a:xfrm>
+            <a:off x="274320" y="1417320"/>
+            <a:ext cx="3657600" cy="411480"/>
+          </a:xfrm>
+          <a:prstGeom prst="rect">
+            <a:avLst/>
+          </a:prstGeom>
+          <a:solidFill>
+            <a:srgbClr val="C62828"/>
+          </a:solidFill>
+          <a:ln>
+            <a:noFill/>
+          </a:ln>
+        </p:spPr>
+        <p:style>
+          <a:lnRef idx="1">
+            <a:schemeClr val="accent1"/>
+          </a:lnRef>
+          <a:fillRef idx="3">
+            <a:schemeClr val="accent1"/>
+          </a:fillRef>
+          <a:effectRef idx="2">
+            <a:schemeClr val="accent1"/>
+          </a:effectRef>
+          <a:fontRef idx="minor">
+            <a:schemeClr val="lt1"/>
+          </a:fontRef>
+        </p:style>
+        <p:txBody>
+          <a:bodyPr rtlCol="0" anchor="ctr"/>
+          <a:lstStyle/>
+          <a:p>
+            <a:pPr algn="ctr"/>
+          </a:p>
+        </p:txBody>
+      </p:sp>
+      <p:sp>
+        <p:nvSpPr>
+          <p:cNvPr id="8" name="TextBox 7"/>
+          <p:cNvSpPr txBox="1"/>
+          <p:nvPr/>
+        </p:nvSpPr>
+        <p:spPr>
+          <a:xfrm>
+            <a:off x="365760" y="1444752"/>
+            <a:ext cx="3474720" cy="347472"/>
+          </a:xfrm>
+          <a:prstGeom prst="rect">
+            <a:avLst/>
+          </a:prstGeom>
+          <a:noFill/>
+        </p:spPr>
+        <p:txBody>
+          <a:bodyPr wrap="square">
+            <a:spAutoFit/>
+          </a:bodyPr>
+          <a:lstStyle/>
+          <a:p>
+            <a:pPr algn="l"/>
+            <a:r>
+              <a:rPr sz="1400" b="1">
+                <a:solidFill>
+                  <a:srgbClr val="FFFFFF"/>
+                </a:solidFill>
+              </a:rPr>
+              <a:t>Testing</a:t>
+            </a:r>
+          </a:p>
+        </p:txBody>
+      </p:sp>
+      <p:sp>
+        <p:nvSpPr>
+          <p:cNvPr id="9" name="TextBox 8"/>
+          <p:cNvSpPr txBox="1"/>
+          <p:nvPr/>
+        </p:nvSpPr>
+        <p:spPr>
+          <a:xfrm>
+            <a:off x="365760" y="1920240"/>
+            <a:ext cx="3474720" cy="3931920"/>
+          </a:xfrm>
+          <a:prstGeom prst="rect">
+            <a:avLst/>
+          </a:prstGeom>
+          <a:noFill/>
+        </p:spPr>
+        <p:txBody>
+          <a:bodyPr wrap="square">
+            <a:spAutoFit/>
+          </a:bodyPr>
+          <a:lstStyle/>
+          <a:p>
+            <a:pPr>
+              <a:spcBef>
+                <a:spcPts val="300"/>
+              </a:spcBef>
+            </a:pPr>
+            <a:r>
+              <a:rPr sz="1300">
+                <a:solidFill>
+                  <a:srgbClr val="444444"/>
+                </a:solidFill>
+              </a:rPr>
+              <a:t>• Add pytest-docker fixture for Milvus integration tests</a:t>
+            </a:r>
+          </a:p>
+          <a:p>
+            <a:pPr>
+              <a:spcBef>
+                <a:spcPts val="300"/>
+              </a:spcBef>
+            </a:pPr>
+            <a:r>
+              <a:rPr sz="1300">
+                <a:solidFill>
+                  <a:srgbClr val="444444"/>
+                </a:solidFill>
+              </a:rPr>
+              <a:t>• Wire integration tests into GitHub Actions with services: block</a:t>
+            </a:r>
+          </a:p>
+          <a:p>
+            <a:pPr>
+              <a:spcBef>
+                <a:spcPts val="300"/>
+              </a:spcBef>
+            </a:pPr>
+            <a:r>
+              <a:rPr sz="1300">
+                <a:solidFill>
+                  <a:srgbClr val="444444"/>
+                </a:solidFill>
+              </a:rPr>
+              <a:t>• Back-fill relevant_chunk_ids in eval dataset post-ingest</a:t>
+            </a:r>
+          </a:p>
+          <a:p>
+            <a:pPr>
+              <a:spcBef>
+                <a:spcPts val="300"/>
+              </a:spcBef>
+            </a:pPr>
+            <a:r>
+              <a:rPr sz="1300">
+                <a:solidFill>
+                  <a:srgbClr val="444444"/>
+                </a:solidFill>
+              </a:rPr>
+              <a:t>• Add OpenAI mock to ingest_documents unit test</a:t>
+            </a:r>
+          </a:p>
+        </p:txBody>
+      </p:sp>
+      <p:sp>
+        <p:nvSpPr>
+          <p:cNvPr id="10" name="Rectangle 9"/>
+          <p:cNvSpPr/>
+          <p:nvPr/>
+        </p:nvSpPr>
+        <p:spPr>
+          <a:xfrm>
+            <a:off x="4169664" y="1417320"/>
+            <a:ext cx="3657600" cy="4572000"/>
+          </a:xfrm>
+          <a:prstGeom prst="rect">
+            <a:avLst/>
+          </a:prstGeom>
+          <a:solidFill>
+            <a:srgbClr val="FFFFFF"/>
+          </a:solidFill>
+          <a:ln>
+            <a:noFill/>
+          </a:ln>
+        </p:spPr>
+        <p:style>
+          <a:lnRef idx="1">
+            <a:schemeClr val="accent1"/>
+          </a:lnRef>
+          <a:fillRef idx="3">
+            <a:schemeClr val="accent1"/>
+          </a:fillRef>
+          <a:effectRef idx="2">
+            <a:schemeClr val="accent1"/>
+          </a:effectRef>
+          <a:fontRef idx="minor">
+            <a:schemeClr val="lt1"/>
+          </a:fontRef>
+        </p:style>
+        <p:txBody>
+          <a:bodyPr rtlCol="0" anchor="ctr"/>
+          <a:lstStyle/>
+          <a:p>
+            <a:pPr algn="ctr"/>
+          </a:p>
+        </p:txBody>
+      </p:sp>
+      <p:sp>
+        <p:nvSpPr>
+          <p:cNvPr id="11" name="Rectangle 10"/>
+          <p:cNvSpPr/>
+          <p:nvPr/>
+        </p:nvSpPr>
+        <p:spPr>
+          <a:xfrm>
+            <a:off x="4169664" y="1417320"/>
+            <a:ext cx="3657600" cy="411480"/>
+          </a:xfrm>
+          <a:prstGeom prst="rect">
+            <a:avLst/>
+          </a:prstGeom>
+          <a:solidFill>
+            <a:srgbClr val="1A376C"/>
+          </a:solidFill>
+          <a:ln>
+            <a:noFill/>
+          </a:ln>
+        </p:spPr>
+        <p:style>
+          <a:lnRef idx="1">
+            <a:schemeClr val="accent1"/>
+          </a:lnRef>
+          <a:fillRef idx="3">
+            <a:schemeClr val="accent1"/>
+          </a:fillRef>
+          <a:effectRef idx="2">
+            <a:schemeClr val="accent1"/>
+          </a:effectRef>
+          <a:fontRef idx="minor">
+            <a:schemeClr val="lt1"/>
+          </a:fontRef>
+        </p:style>
+        <p:txBody>
+          <a:bodyPr rtlCol="0" anchor="ctr"/>
+          <a:lstStyle/>
+          <a:p>
+            <a:pPr algn="ctr"/>
+          </a:p>
+        </p:txBody>
+      </p:sp>
+      <p:sp>
+        <p:nvSpPr>
+          <p:cNvPr id="12" name="TextBox 11"/>
+          <p:cNvSpPr txBox="1"/>
+          <p:nvPr/>
+        </p:nvSpPr>
+        <p:spPr>
+          <a:xfrm>
+            <a:off x="4261104" y="1444752"/>
+            <a:ext cx="3474720" cy="347472"/>
+          </a:xfrm>
+          <a:prstGeom prst="rect">
+            <a:avLst/>
+          </a:prstGeom>
+          <a:noFill/>
+        </p:spPr>
+        <p:txBody>
+          <a:bodyPr wrap="square">
+            <a:spAutoFit/>
+          </a:bodyPr>
+          <a:lstStyle/>
+          <a:p>
+            <a:pPr algn="l"/>
+            <a:r>
+              <a:rPr sz="1400" b="1">
+                <a:solidFill>
+                  <a:srgbClr val="FFFFFF"/>
+                </a:solidFill>
+              </a:rPr>
+              <a:t>Architecture</a:t>
+            </a:r>
+          </a:p>
+        </p:txBody>
+      </p:sp>
+      <p:sp>
+        <p:nvSpPr>
+          <p:cNvPr id="13" name="TextBox 12"/>
+          <p:cNvSpPr txBox="1"/>
+          <p:nvPr/>
+        </p:nvSpPr>
+        <p:spPr>
+          <a:xfrm>
+            <a:off x="4261104" y="1920240"/>
+            <a:ext cx="3474720" cy="3931920"/>
+          </a:xfrm>
+          <a:prstGeom prst="rect">
+            <a:avLst/>
+          </a:prstGeom>
+          <a:noFill/>
+        </p:spPr>
+        <p:txBody>
+          <a:bodyPr wrap="square">
+            <a:spAutoFit/>
+          </a:bodyPr>
+          <a:lstStyle/>
+          <a:p>
+            <a:pPr>
+              <a:spcBef>
+                <a:spcPts val="300"/>
+              </a:spcBef>
+            </a:pPr>
+            <a:r>
+              <a:rPr sz="1300">
+                <a:solidFill>
+                  <a:srgbClr val="444444"/>
+                </a:solidFill>
+              </a:rPr>
+              <a:t>• Module-level MilvusVectorStore singleton (one connection per process)</a:t>
+            </a:r>
+          </a:p>
+          <a:p>
+            <a:pPr>
+              <a:spcBef>
+                <a:spcPts val="300"/>
+              </a:spcBef>
+            </a:pPr>
+            <a:r>
+              <a:rPr sz="1300">
+                <a:solidFill>
+                  <a:srgbClr val="444444"/>
+                </a:solidFill>
+              </a:rPr>
+              <a:t>• SQLAlchemy engine as long-lived connection pool in FastAPI lifespan</a:t>
+            </a:r>
+          </a:p>
+          <a:p>
+            <a:pPr>
+              <a:spcBef>
+                <a:spcPts val="300"/>
+              </a:spcBef>
+            </a:pPr>
+            <a:r>
+              <a:rPr sz="1300">
+                <a:solidFill>
+                  <a:srgbClr val="444444"/>
+                </a:solidFill>
+              </a:rPr>
+              <a:t>• Switch reservation extraction to LLM .with_structured_output()</a:t>
+            </a:r>
+          </a:p>
+          <a:p>
+            <a:pPr>
+              <a:spcBef>
+                <a:spcPts val="300"/>
+              </a:spcBef>
+            </a:pPr>
+            <a:r>
+              <a:rPr sz="1300">
+                <a:solidFill>
+                  <a:srgbClr val="444444"/>
+                </a:solidFill>
+              </a:rPr>
+              <a:t>• Store retrieved_chunks as plain dicts (JSON-serialisable for checkpointing)</a:t>
+            </a:r>
+          </a:p>
+        </p:txBody>
+      </p:sp>
+      <p:sp>
+        <p:nvSpPr>
+          <p:cNvPr id="14" name="Rectangle 13"/>
+          <p:cNvSpPr/>
+          <p:nvPr/>
+        </p:nvSpPr>
+        <p:spPr>
+          <a:xfrm>
+            <a:off x="8065008" y="1417320"/>
+            <a:ext cx="3657600" cy="4572000"/>
+          </a:xfrm>
+          <a:prstGeom prst="rect">
+            <a:avLst/>
+          </a:prstGeom>
+          <a:solidFill>
+            <a:srgbClr val="FFFFFF"/>
+          </a:solidFill>
+          <a:ln>
+            <a:noFill/>
+          </a:ln>
+        </p:spPr>
+        <p:style>
+          <a:lnRef idx="1">
+            <a:schemeClr val="accent1"/>
+          </a:lnRef>
+          <a:fillRef idx="3">
+            <a:schemeClr val="accent1"/>
+          </a:fillRef>
+          <a:effectRef idx="2">
+            <a:schemeClr val="accent1"/>
+          </a:effectRef>
+          <a:fontRef idx="minor">
+            <a:schemeClr val="lt1"/>
+          </a:fontRef>
+        </p:style>
+        <p:txBody>
+          <a:bodyPr rtlCol="0" anchor="ctr"/>
+          <a:lstStyle/>
+          <a:p>
+            <a:pPr algn="ctr"/>
+          </a:p>
+        </p:txBody>
+      </p:sp>
+      <p:sp>
+        <p:nvSpPr>
+          <p:cNvPr id="15" name="Rectangle 14"/>
+          <p:cNvSpPr/>
+          <p:nvPr/>
+        </p:nvSpPr>
+        <p:spPr>
+          <a:xfrm>
+            <a:off x="8065008" y="1417320"/>
+            <a:ext cx="3657600" cy="411480"/>
+          </a:xfrm>
+          <a:prstGeom prst="rect">
+            <a:avLst/>
+          </a:prstGeom>
+          <a:solidFill>
+            <a:srgbClr val="007A87"/>
+          </a:solidFill>
+          <a:ln>
+            <a:noFill/>
+          </a:ln>
+        </p:spPr>
+        <p:style>
+          <a:lnRef idx="1">
+            <a:schemeClr val="accent1"/>
+          </a:lnRef>
+          <a:fillRef idx="3">
+            <a:schemeClr val="accent1"/>
+          </a:fillRef>
+          <a:effectRef idx="2">
+            <a:schemeClr val="accent1"/>
+          </a:effectRef>
+          <a:fontRef idx="minor">
+            <a:schemeClr val="lt1"/>
+          </a:fontRef>
+        </p:style>
+        <p:txBody>
+          <a:bodyPr rtlCol="0" anchor="ctr"/>
+          <a:lstStyle/>
+          <a:p>
+            <a:pPr algn="ctr"/>
+          </a:p>
+        </p:txBody>
+      </p:sp>
+      <p:sp>
+        <p:nvSpPr>
+          <p:cNvPr id="16" name="TextBox 15"/>
+          <p:cNvSpPr txBox="1"/>
+          <p:nvPr/>
+        </p:nvSpPr>
+        <p:spPr>
+          <a:xfrm>
+            <a:off x="8156448" y="1444752"/>
+            <a:ext cx="3474720" cy="347472"/>
+          </a:xfrm>
+          <a:prstGeom prst="rect">
+            <a:avLst/>
+          </a:prstGeom>
+          <a:noFill/>
+        </p:spPr>
+        <p:txBody>
+          <a:bodyPr wrap="square">
+            <a:spAutoFit/>
+          </a:bodyPr>
+          <a:lstStyle/>
+          <a:p>
+            <a:pPr algn="l"/>
+            <a:r>
+              <a:rPr sz="1400" b="1">
+                <a:solidFill>
+                  <a:srgbClr val="FFFFFF"/>
+                </a:solidFill>
+              </a:rPr>
+              <a:t>Operational</a:t>
+            </a:r>
+          </a:p>
+        </p:txBody>
+      </p:sp>
+      <p:sp>
+        <p:nvSpPr>
+          <p:cNvPr id="17" name="TextBox 16"/>
+          <p:cNvSpPr txBox="1"/>
+          <p:nvPr/>
+        </p:nvSpPr>
+        <p:spPr>
+          <a:xfrm>
+            <a:off x="8156448" y="1920240"/>
+            <a:ext cx="3474720" cy="3931920"/>
+          </a:xfrm>
+          <a:prstGeom prst="rect">
+            <a:avLst/>
+          </a:prstGeom>
+          <a:noFill/>
+        </p:spPr>
+        <p:txBody>
+          <a:bodyPr wrap="square">
+            <a:spAutoFit/>
+          </a:bodyPr>
+          <a:lstStyle/>
+          <a:p>
+            <a:pPr>
+              <a:spcBef>
+                <a:spcPts val="300"/>
+              </a:spcBef>
+            </a:pPr>
+            <a:r>
+              <a:rPr sz="1300">
+                <a:solidFill>
+                  <a:srgbClr val="444444"/>
+                </a:solidFill>
+              </a:rPr>
+              <a:t>• Request-level INFO log: session_id · intent · latency per request</a:t>
+            </a:r>
+          </a:p>
+          <a:p>
+            <a:pPr>
+              <a:spcBef>
+                <a:spcPts val="300"/>
+              </a:spcBef>
+            </a:pPr>
+            <a:r>
+              <a:rPr sz="1300">
+                <a:solidFill>
+                  <a:srgbClr val="444444"/>
+                </a:solidFill>
+              </a:rPr>
+              <a:t>• Force error if ADMIN_TOKEN == 'change-me' in production config</a:t>
+            </a:r>
+          </a:p>
+          <a:p>
+            <a:pPr>
+              <a:spcBef>
+                <a:spcPts val="300"/>
+              </a:spcBef>
+            </a:pPr>
+            <a:r>
+              <a:rPr sz="1300">
+                <a:solidFill>
+                  <a:srgbClr val="444444"/>
+                </a:solidFill>
+              </a:rPr>
+              <a:t>• Alembic migrations replacing create_all for production schema management</a:t>
+            </a:r>
+          </a:p>
+          <a:p>
+            <a:pPr>
+              <a:spcBef>
+                <a:spcPts val="300"/>
+              </a:spcBef>
+            </a:pPr>
+            <a:r>
+              <a:rPr sz="1300">
+                <a:solidFill>
+                  <a:srgbClr val="444444"/>
+                </a:solidFill>
+              </a:rPr>
               <a:t>• Human-in-the-loop reservation approval (Stage 3 scope)</a:t>
             </a:r>
           </a:p>
@@ -7133,7 +10275,7 @@
                   <a:srgbClr val="444444"/>
                 </a:solidFill>
               </a:rPr>
-              <a:t>Stage 1 ✅ complete  ·  Stage 2: enhanced retrieval + HITL reservation  ·  Stage 3: multi-tenant + auth  ·  Stage 4: production hardening</a:t>
+              <a:t>Stage 1 ✅ RAG Foundation  ·  Stage 3 ✅ HITL Approval  ·  Stage 2: enhanced retrieval  ·  Stage 4: multi-tenant + production hardening</a:t>
             </a:r>
           </a:p>
         </p:txBody>
@@ -7147,7 +10289,7 @@
 </file>
 
 <file path=ppt/slides/slide2.xml><?xml version="1.0" encoding="utf-8"?>
-<p:sld xmlns:a="http://schemas.openxmlformats.org/drawingml/2006/main" xmlns:r="http://schemas.openxmlformats.org/officeDocument/2006/relationships" xmlns:p="http://schemas.openxmlformats.org/presentationml/2006/main">
+<p:sld xmlns:a="http://schemas.openxmlformats.org/drawingml/2006/main" xmlns:p="http://schemas.openxmlformats.org/presentationml/2006/main" xmlns:r="http://schemas.openxmlformats.org/officeDocument/2006/relationships">
   <p:cSld>
     <p:spTree>
       <p:nvGrpSpPr>
@@ -7155,14 +10297,7 @@
         <p:cNvGrpSpPr/>
         <p:nvPr/>
       </p:nvGrpSpPr>
-      <p:grpSpPr>
-        <a:xfrm>
-          <a:off x="0" y="0"/>
-          <a:ext cx="0" cy="0"/>
-          <a:chOff x="0" y="0"/>
-          <a:chExt cx="0" cy="0"/>
-        </a:xfrm>
-      </p:grpSpPr>
+      <p:grpSpPr/>
       <p:sp>
         <p:nvSpPr>
           <p:cNvPr id="2" name="Rectangle 1"/>
@@ -7203,7 +10338,6 @@
           <a:lstStyle/>
           <a:p>
             <a:pPr algn="ctr"/>
-            <a:endParaRPr/>
           </a:p>
         </p:txBody>
       </p:sp>
@@ -7247,7 +10381,6 @@
           <a:lstStyle/>
           <a:p>
             <a:pPr algn="ctr"/>
-            <a:endParaRPr/>
           </a:p>
         </p:txBody>
       </p:sp>
@@ -7359,7 +10492,6 @@
           <a:lstStyle/>
           <a:p>
             <a:pPr algn="ctr"/>
-            <a:endParaRPr/>
           </a:p>
         </p:txBody>
       </p:sp>
@@ -7520,7 +10652,6 @@
           <a:lstStyle/>
           <a:p>
             <a:pPr algn="ctr"/>
-            <a:endParaRPr/>
           </a:p>
         </p:txBody>
       </p:sp>
@@ -7696,7 +10827,6 @@
           <a:lstStyle/>
           <a:p>
             <a:pPr algn="ctr"/>
-            <a:endParaRPr/>
           </a:p>
         </p:txBody>
       </p:sp>
@@ -7774,7 +10904,6 @@
           <a:lstStyle/>
           <a:p>
             <a:pPr algn="ctr"/>
-            <a:endParaRPr/>
           </a:p>
         </p:txBody>
       </p:sp>
@@ -7818,7 +10947,6 @@
           <a:lstStyle/>
           <a:p>
             <a:pPr algn="ctr"/>
-            <a:endParaRPr/>
           </a:p>
         </p:txBody>
       </p:sp>
@@ -7896,7 +11024,6 @@
           <a:lstStyle/>
           <a:p>
             <a:pPr algn="ctr"/>
-            <a:endParaRPr/>
           </a:p>
         </p:txBody>
       </p:sp>
@@ -7940,7 +11067,6 @@
           <a:lstStyle/>
           <a:p>
             <a:pPr algn="ctr"/>
-            <a:endParaRPr/>
           </a:p>
         </p:txBody>
       </p:sp>
@@ -8018,7 +11144,6 @@
           <a:lstStyle/>
           <a:p>
             <a:pPr algn="ctr"/>
-            <a:endParaRPr/>
           </a:p>
         </p:txBody>
       </p:sp>
@@ -8062,7 +11187,6 @@
           <a:lstStyle/>
           <a:p>
             <a:pPr algn="ctr"/>
-            <a:endParaRPr/>
           </a:p>
         </p:txBody>
       </p:sp>
@@ -8140,7 +11264,6 @@
           <a:lstStyle/>
           <a:p>
             <a:pPr algn="ctr"/>
-            <a:endParaRPr/>
           </a:p>
         </p:txBody>
       </p:sp>
@@ -8187,7 +11310,7 @@
 </file>
 
 <file path=ppt/slides/slide3.xml><?xml version="1.0" encoding="utf-8"?>
-<p:sld xmlns:a="http://schemas.openxmlformats.org/drawingml/2006/main" xmlns:r="http://schemas.openxmlformats.org/officeDocument/2006/relationships" xmlns:p="http://schemas.openxmlformats.org/presentationml/2006/main">
+<p:sld xmlns:a="http://schemas.openxmlformats.org/drawingml/2006/main" xmlns:p="http://schemas.openxmlformats.org/presentationml/2006/main" xmlns:r="http://schemas.openxmlformats.org/officeDocument/2006/relationships">
   <p:cSld>
     <p:spTree>
       <p:nvGrpSpPr>
@@ -8195,14 +11318,7 @@
         <p:cNvGrpSpPr/>
         <p:nvPr/>
       </p:nvGrpSpPr>
-      <p:grpSpPr>
-        <a:xfrm>
-          <a:off x="0" y="0"/>
-          <a:ext cx="0" cy="0"/>
-          <a:chOff x="0" y="0"/>
-          <a:chExt cx="0" cy="0"/>
-        </a:xfrm>
-      </p:grpSpPr>
+      <p:grpSpPr/>
       <p:sp>
         <p:nvSpPr>
           <p:cNvPr id="2" name="Rectangle 1"/>
@@ -8243,7 +11359,6 @@
           <a:lstStyle/>
           <a:p>
             <a:pPr algn="ctr"/>
-            <a:endParaRPr/>
           </a:p>
         </p:txBody>
       </p:sp>
@@ -8287,7 +11402,6 @@
           <a:lstStyle/>
           <a:p>
             <a:pPr algn="ctr"/>
-            <a:endParaRPr/>
           </a:p>
         </p:txBody>
       </p:sp>
@@ -8399,7 +11513,6 @@
           <a:lstStyle/>
           <a:p>
             <a:pPr algn="ctr"/>
-            <a:endParaRPr/>
           </a:p>
         </p:txBody>
       </p:sp>
@@ -8477,7 +11590,6 @@
           <a:lstStyle/>
           <a:p>
             <a:pPr algn="ctr"/>
-            <a:endParaRPr/>
           </a:p>
         </p:txBody>
       </p:sp>
@@ -8625,7 +11737,6 @@
           <a:lstStyle/>
           <a:p>
             <a:pPr algn="ctr"/>
-            <a:endParaRPr/>
           </a:p>
         </p:txBody>
       </p:sp>
@@ -8739,7 +11850,6 @@
           <a:lstStyle/>
           <a:p>
             <a:pPr algn="ctr"/>
-            <a:endParaRPr/>
           </a:p>
         </p:txBody>
       </p:sp>
@@ -8817,7 +11927,6 @@
           <a:lstStyle/>
           <a:p>
             <a:pPr algn="ctr"/>
-            <a:endParaRPr/>
           </a:p>
         </p:txBody>
       </p:sp>
@@ -8895,7 +12004,6 @@
           <a:lstStyle/>
           <a:p>
             <a:pPr algn="ctr"/>
-            <a:endParaRPr/>
           </a:p>
         </p:txBody>
       </p:sp>
@@ -8973,7 +12081,6 @@
           <a:lstStyle/>
           <a:p>
             <a:pPr algn="ctr"/>
-            <a:endParaRPr/>
           </a:p>
         </p:txBody>
       </p:sp>
@@ -9051,7 +12158,6 @@
           <a:lstStyle/>
           <a:p>
             <a:pPr algn="ctr"/>
-            <a:endParaRPr/>
           </a:p>
         </p:txBody>
       </p:sp>
@@ -9129,7 +12235,6 @@
           <a:lstStyle/>
           <a:p>
             <a:pPr algn="ctr"/>
-            <a:endParaRPr/>
           </a:p>
         </p:txBody>
       </p:sp>
@@ -9207,7 +12312,6 @@
           <a:lstStyle/>
           <a:p>
             <a:pPr algn="ctr"/>
-            <a:endParaRPr/>
           </a:p>
         </p:txBody>
       </p:sp>
@@ -9285,7 +12389,6 @@
           <a:lstStyle/>
           <a:p>
             <a:pPr algn="ctr"/>
-            <a:endParaRPr/>
           </a:p>
         </p:txBody>
       </p:sp>
@@ -9363,7 +12466,6 @@
           <a:lstStyle/>
           <a:p>
             <a:pPr algn="ctr"/>
-            <a:endParaRPr/>
           </a:p>
         </p:txBody>
       </p:sp>
@@ -9476,7 +12578,6 @@
           <a:lstStyle/>
           <a:p>
             <a:pPr algn="ctr"/>
-            <a:endParaRPr/>
           </a:p>
         </p:txBody>
       </p:sp>
@@ -9590,7 +12691,6 @@
           <a:lstStyle/>
           <a:p>
             <a:pPr algn="ctr"/>
-            <a:endParaRPr/>
           </a:p>
         </p:txBody>
       </p:sp>
@@ -9704,7 +12804,6 @@
           <a:lstStyle/>
           <a:p>
             <a:pPr algn="ctr"/>
-            <a:endParaRPr/>
           </a:p>
         </p:txBody>
       </p:sp>
@@ -9818,7 +12917,6 @@
           <a:lstStyle/>
           <a:p>
             <a:pPr algn="ctr"/>
-            <a:endParaRPr/>
           </a:p>
         </p:txBody>
       </p:sp>
@@ -9935,7 +13033,7 @@
 </file>
 
 <file path=ppt/slides/slide4.xml><?xml version="1.0" encoding="utf-8"?>
-<p:sld xmlns:a="http://schemas.openxmlformats.org/drawingml/2006/main" xmlns:r="http://schemas.openxmlformats.org/officeDocument/2006/relationships" xmlns:p="http://schemas.openxmlformats.org/presentationml/2006/main">
+<p:sld xmlns:a="http://schemas.openxmlformats.org/drawingml/2006/main" xmlns:p="http://schemas.openxmlformats.org/presentationml/2006/main" xmlns:r="http://schemas.openxmlformats.org/officeDocument/2006/relationships">
   <p:cSld>
     <p:spTree>
       <p:nvGrpSpPr>
@@ -9943,14 +13041,7 @@
         <p:cNvGrpSpPr/>
         <p:nvPr/>
       </p:nvGrpSpPr>
-      <p:grpSpPr>
-        <a:xfrm>
-          <a:off x="0" y="0"/>
-          <a:ext cx="0" cy="0"/>
-          <a:chOff x="0" y="0"/>
-          <a:chExt cx="0" cy="0"/>
-        </a:xfrm>
-      </p:grpSpPr>
+      <p:grpSpPr/>
       <p:sp>
         <p:nvSpPr>
           <p:cNvPr id="2" name="Rectangle 1"/>
@@ -9991,7 +13082,6 @@
           <a:lstStyle/>
           <a:p>
             <a:pPr algn="ctr"/>
-            <a:endParaRPr/>
           </a:p>
         </p:txBody>
       </p:sp>
@@ -10035,7 +13125,6 @@
           <a:lstStyle/>
           <a:p>
             <a:pPr algn="ctr"/>
-            <a:endParaRPr/>
           </a:p>
         </p:txBody>
       </p:sp>
@@ -10147,7 +13236,6 @@
           <a:lstStyle/>
           <a:p>
             <a:pPr algn="ctr"/>
-            <a:endParaRPr/>
           </a:p>
         </p:txBody>
       </p:sp>
@@ -10225,7 +13313,6 @@
           <a:lstStyle/>
           <a:p>
             <a:pPr algn="ctr"/>
-            <a:endParaRPr/>
           </a:p>
         </p:txBody>
       </p:sp>
@@ -10338,7 +13425,6 @@
           <a:lstStyle/>
           <a:p>
             <a:pPr algn="ctr"/>
-            <a:endParaRPr/>
           </a:p>
         </p:txBody>
       </p:sp>
@@ -10416,7 +13502,6 @@
           <a:lstStyle/>
           <a:p>
             <a:pPr algn="ctr"/>
-            <a:endParaRPr/>
           </a:p>
         </p:txBody>
       </p:sp>
@@ -10529,7 +13614,6 @@
           <a:lstStyle/>
           <a:p>
             <a:pPr algn="ctr"/>
-            <a:endParaRPr/>
           </a:p>
         </p:txBody>
       </p:sp>
@@ -10607,7 +13691,6 @@
           <a:lstStyle/>
           <a:p>
             <a:pPr algn="ctr"/>
-            <a:endParaRPr/>
           </a:p>
         </p:txBody>
       </p:sp>
@@ -10720,7 +13803,6 @@
           <a:lstStyle/>
           <a:p>
             <a:pPr algn="ctr"/>
-            <a:endParaRPr/>
           </a:p>
         </p:txBody>
       </p:sp>
@@ -10798,7 +13880,6 @@
           <a:lstStyle/>
           <a:p>
             <a:pPr algn="ctr"/>
-            <a:endParaRPr/>
           </a:p>
         </p:txBody>
       </p:sp>
@@ -10911,7 +13992,6 @@
           <a:lstStyle/>
           <a:p>
             <a:pPr algn="ctr"/>
-            <a:endParaRPr/>
           </a:p>
         </p:txBody>
       </p:sp>
@@ -10989,7 +14069,6 @@
           <a:lstStyle/>
           <a:p>
             <a:pPr algn="ctr"/>
-            <a:endParaRPr/>
           </a:p>
         </p:txBody>
       </p:sp>
@@ -11102,7 +14181,6 @@
           <a:lstStyle/>
           <a:p>
             <a:pPr algn="ctr"/>
-            <a:endParaRPr/>
           </a:p>
         </p:txBody>
       </p:sp>
@@ -11180,7 +14258,6 @@
           <a:lstStyle/>
           <a:p>
             <a:pPr algn="ctr"/>
-            <a:endParaRPr/>
           </a:p>
         </p:txBody>
       </p:sp>
@@ -11293,7 +14370,6 @@
           <a:lstStyle/>
           <a:p>
             <a:pPr algn="ctr"/>
-            <a:endParaRPr/>
           </a:p>
         </p:txBody>
       </p:sp>
@@ -11371,7 +14447,6 @@
           <a:lstStyle/>
           <a:p>
             <a:pPr algn="ctr"/>
-            <a:endParaRPr/>
           </a:p>
         </p:txBody>
       </p:sp>
@@ -11484,7 +14559,6 @@
           <a:lstStyle/>
           <a:p>
             <a:pPr algn="ctr"/>
-            <a:endParaRPr/>
           </a:p>
         </p:txBody>
       </p:sp>
@@ -11562,7 +14636,6 @@
           <a:lstStyle/>
           <a:p>
             <a:pPr algn="ctr"/>
-            <a:endParaRPr/>
           </a:p>
         </p:txBody>
       </p:sp>
@@ -11641,7 +14714,6 @@
           <a:lstStyle/>
           <a:p>
             <a:pPr algn="ctr"/>
-            <a:endParaRPr/>
           </a:p>
         </p:txBody>
       </p:sp>
@@ -11719,7 +14791,6 @@
           <a:lstStyle/>
           <a:p>
             <a:pPr algn="ctr"/>
-            <a:endParaRPr/>
           </a:p>
         </p:txBody>
       </p:sp>
@@ -11797,7 +14868,6 @@
           <a:lstStyle/>
           <a:p>
             <a:pPr algn="ctr"/>
-            <a:endParaRPr/>
           </a:p>
         </p:txBody>
       </p:sp>
@@ -11956,7 +15026,7 @@
 </file>
 
 <file path=ppt/slides/slide5.xml><?xml version="1.0" encoding="utf-8"?>
-<p:sld xmlns:a="http://schemas.openxmlformats.org/drawingml/2006/main" xmlns:r="http://schemas.openxmlformats.org/officeDocument/2006/relationships" xmlns:p="http://schemas.openxmlformats.org/presentationml/2006/main">
+<p:sld xmlns:a="http://schemas.openxmlformats.org/drawingml/2006/main" xmlns:p="http://schemas.openxmlformats.org/presentationml/2006/main" xmlns:r="http://schemas.openxmlformats.org/officeDocument/2006/relationships">
   <p:cSld>
     <p:spTree>
       <p:nvGrpSpPr>
@@ -11964,14 +15034,7 @@
         <p:cNvGrpSpPr/>
         <p:nvPr/>
       </p:nvGrpSpPr>
-      <p:grpSpPr>
-        <a:xfrm>
-          <a:off x="0" y="0"/>
-          <a:ext cx="0" cy="0"/>
-          <a:chOff x="0" y="0"/>
-          <a:chExt cx="0" cy="0"/>
-        </a:xfrm>
-      </p:grpSpPr>
+      <p:grpSpPr/>
       <p:sp>
         <p:nvSpPr>
           <p:cNvPr id="2" name="Rectangle 1"/>
@@ -12012,7 +15075,6 @@
           <a:lstStyle/>
           <a:p>
             <a:pPr algn="ctr"/>
-            <a:endParaRPr/>
           </a:p>
         </p:txBody>
       </p:sp>
@@ -12056,7 +15118,6 @@
           <a:lstStyle/>
           <a:p>
             <a:pPr algn="ctr"/>
-            <a:endParaRPr/>
           </a:p>
         </p:txBody>
       </p:sp>
@@ -12168,7 +15229,6 @@
           <a:lstStyle/>
           <a:p>
             <a:pPr algn="ctr"/>
-            <a:endParaRPr/>
           </a:p>
         </p:txBody>
       </p:sp>
@@ -12281,7 +15341,6 @@
           <a:lstStyle/>
           <a:p>
             <a:pPr algn="ctr"/>
-            <a:endParaRPr/>
           </a:p>
         </p:txBody>
       </p:sp>
@@ -12462,7 +15521,6 @@
           <a:lstStyle/>
           <a:p>
             <a:pPr algn="ctr"/>
-            <a:endParaRPr/>
           </a:p>
         </p:txBody>
       </p:sp>
@@ -12575,7 +15633,6 @@
           <a:lstStyle/>
           <a:p>
             <a:pPr algn="ctr"/>
-            <a:endParaRPr/>
           </a:p>
         </p:txBody>
       </p:sp>
@@ -12688,7 +15745,6 @@
           <a:lstStyle/>
           <a:p>
             <a:pPr algn="ctr"/>
-            <a:endParaRPr/>
           </a:p>
         </p:txBody>
       </p:sp>
@@ -12801,7 +15857,6 @@
           <a:lstStyle/>
           <a:p>
             <a:pPr algn="ctr"/>
-            <a:endParaRPr/>
           </a:p>
         </p:txBody>
       </p:sp>
@@ -12914,7 +15969,6 @@
           <a:lstStyle/>
           <a:p>
             <a:pPr algn="ctr"/>
-            <a:endParaRPr/>
           </a:p>
         </p:txBody>
       </p:sp>
@@ -13027,7 +16081,6 @@
           <a:lstStyle/>
           <a:p>
             <a:pPr algn="ctr"/>
-            <a:endParaRPr/>
           </a:p>
         </p:txBody>
       </p:sp>
@@ -13139,7 +16192,6 @@
           <a:lstStyle/>
           <a:p>
             <a:pPr algn="ctr"/>
-            <a:endParaRPr/>
           </a:p>
         </p:txBody>
       </p:sp>
@@ -13253,7 +16305,6 @@
           <a:lstStyle/>
           <a:p>
             <a:pPr algn="ctr"/>
-            <a:endParaRPr/>
           </a:p>
         </p:txBody>
       </p:sp>
@@ -13366,7 +16417,6 @@
           <a:lstStyle/>
           <a:p>
             <a:pPr algn="ctr"/>
-            <a:endParaRPr/>
           </a:p>
         </p:txBody>
       </p:sp>
@@ -13478,7 +16528,6 @@
           <a:lstStyle/>
           <a:p>
             <a:pPr algn="ctr"/>
-            <a:endParaRPr/>
           </a:p>
         </p:txBody>
       </p:sp>
@@ -13591,7 +16640,6 @@
           <a:lstStyle/>
           <a:p>
             <a:pPr algn="ctr"/>
-            <a:endParaRPr/>
           </a:p>
         </p:txBody>
       </p:sp>
@@ -13704,7 +16752,6 @@
           <a:lstStyle/>
           <a:p>
             <a:pPr algn="ctr"/>
-            <a:endParaRPr/>
           </a:p>
         </p:txBody>
       </p:sp>
@@ -13782,7 +16829,6 @@
           <a:lstStyle/>
           <a:p>
             <a:pPr algn="ctr"/>
-            <a:endParaRPr/>
           </a:p>
         </p:txBody>
       </p:sp>
@@ -13995,7 +17041,7 @@
 </file>
 
 <file path=ppt/slides/slide6.xml><?xml version="1.0" encoding="utf-8"?>
-<p:sld xmlns:a="http://schemas.openxmlformats.org/drawingml/2006/main" xmlns:r="http://schemas.openxmlformats.org/officeDocument/2006/relationships" xmlns:p="http://schemas.openxmlformats.org/presentationml/2006/main">
+<p:sld xmlns:a="http://schemas.openxmlformats.org/drawingml/2006/main" xmlns:p="http://schemas.openxmlformats.org/presentationml/2006/main" xmlns:r="http://schemas.openxmlformats.org/officeDocument/2006/relationships">
   <p:cSld>
     <p:spTree>
       <p:nvGrpSpPr>
@@ -14003,14 +17049,7 @@
         <p:cNvGrpSpPr/>
         <p:nvPr/>
       </p:nvGrpSpPr>
-      <p:grpSpPr>
-        <a:xfrm>
-          <a:off x="0" y="0"/>
-          <a:ext cx="0" cy="0"/>
-          <a:chOff x="0" y="0"/>
-          <a:chExt cx="0" cy="0"/>
-        </a:xfrm>
-      </p:grpSpPr>
+      <p:grpSpPr/>
       <p:sp>
         <p:nvSpPr>
           <p:cNvPr id="2" name="Rectangle 1"/>
@@ -14051,7 +17090,6 @@
           <a:lstStyle/>
           <a:p>
             <a:pPr algn="ctr"/>
-            <a:endParaRPr/>
           </a:p>
         </p:txBody>
       </p:sp>
@@ -14095,7 +17133,6 @@
           <a:lstStyle/>
           <a:p>
             <a:pPr algn="ctr"/>
-            <a:endParaRPr/>
           </a:p>
         </p:txBody>
       </p:sp>
@@ -14207,7 +17244,6 @@
           <a:lstStyle/>
           <a:p>
             <a:pPr algn="ctr"/>
-            <a:endParaRPr/>
           </a:p>
         </p:txBody>
       </p:sp>
@@ -14251,7 +17287,6 @@
           <a:lstStyle/>
           <a:p>
             <a:pPr algn="ctr"/>
-            <a:endParaRPr/>
           </a:p>
         </p:txBody>
       </p:sp>
@@ -14427,7 +17462,6 @@
           <a:lstStyle/>
           <a:p>
             <a:pPr algn="ctr"/>
-            <a:endParaRPr/>
           </a:p>
         </p:txBody>
       </p:sp>
@@ -14471,7 +17505,6 @@
           <a:lstStyle/>
           <a:p>
             <a:pPr algn="ctr"/>
-            <a:endParaRPr/>
           </a:p>
         </p:txBody>
       </p:sp>
@@ -14647,7 +17680,6 @@
           <a:lstStyle/>
           <a:p>
             <a:pPr algn="ctr"/>
-            <a:endParaRPr/>
           </a:p>
         </p:txBody>
       </p:sp>
@@ -14794,7 +17826,6 @@
           <a:lstStyle/>
           <a:p>
             <a:pPr algn="ctr"/>
-            <a:endParaRPr/>
           </a:p>
         </p:txBody>
       </p:sp>
@@ -14908,7 +17939,6 @@
           <a:lstStyle/>
           <a:p>
             <a:pPr algn="ctr"/>
-            <a:endParaRPr/>
           </a:p>
         </p:txBody>
       </p:sp>
@@ -15022,7 +18052,6 @@
           <a:lstStyle/>
           <a:p>
             <a:pPr algn="ctr"/>
-            <a:endParaRPr/>
           </a:p>
         </p:txBody>
       </p:sp>
@@ -15135,7 +18164,6 @@
           <a:lstStyle/>
           <a:p>
             <a:pPr algn="ctr"/>
-            <a:endParaRPr/>
           </a:p>
         </p:txBody>
       </p:sp>
@@ -15248,7 +18276,6 @@
           <a:lstStyle/>
           <a:p>
             <a:pPr algn="ctr"/>
-            <a:endParaRPr/>
           </a:p>
         </p:txBody>
       </p:sp>
@@ -15296,7 +18323,7 @@
 </file>
 
 <file path=ppt/slides/slide7.xml><?xml version="1.0" encoding="utf-8"?>
-<p:sld xmlns:a="http://schemas.openxmlformats.org/drawingml/2006/main" xmlns:r="http://schemas.openxmlformats.org/officeDocument/2006/relationships" xmlns:p="http://schemas.openxmlformats.org/presentationml/2006/main">
+<p:sld xmlns:a="http://schemas.openxmlformats.org/drawingml/2006/main" xmlns:p="http://schemas.openxmlformats.org/presentationml/2006/main" xmlns:r="http://schemas.openxmlformats.org/officeDocument/2006/relationships">
   <p:cSld>
     <p:spTree>
       <p:nvGrpSpPr>
@@ -15304,14 +18331,7 @@
         <p:cNvGrpSpPr/>
         <p:nvPr/>
       </p:nvGrpSpPr>
-      <p:grpSpPr>
-        <a:xfrm>
-          <a:off x="0" y="0"/>
-          <a:ext cx="0" cy="0"/>
-          <a:chOff x="0" y="0"/>
-          <a:chExt cx="0" cy="0"/>
-        </a:xfrm>
-      </p:grpSpPr>
+      <p:grpSpPr/>
       <p:sp>
         <p:nvSpPr>
           <p:cNvPr id="2" name="Rectangle 1"/>
@@ -15352,7 +18372,6 @@
           <a:lstStyle/>
           <a:p>
             <a:pPr algn="ctr"/>
-            <a:endParaRPr/>
           </a:p>
         </p:txBody>
       </p:sp>
@@ -15396,7 +18415,6 @@
           <a:lstStyle/>
           <a:p>
             <a:pPr algn="ctr"/>
-            <a:endParaRPr/>
           </a:p>
         </p:txBody>
       </p:sp>
@@ -15508,7 +18526,6 @@
           <a:lstStyle/>
           <a:p>
             <a:pPr algn="ctr"/>
-            <a:endParaRPr/>
           </a:p>
         </p:txBody>
       </p:sp>
@@ -15622,7 +18639,6 @@
           <a:lstStyle/>
           <a:p>
             <a:pPr algn="ctr"/>
-            <a:endParaRPr/>
           </a:p>
         </p:txBody>
       </p:sp>
@@ -15736,7 +18752,6 @@
           <a:lstStyle/>
           <a:p>
             <a:pPr algn="ctr"/>
-            <a:endParaRPr/>
           </a:p>
         </p:txBody>
       </p:sp>
@@ -15884,7 +18899,6 @@
           <a:lstStyle/>
           <a:p>
             <a:pPr algn="ctr"/>
-            <a:endParaRPr/>
           </a:p>
         </p:txBody>
       </p:sp>
@@ -16031,7 +19045,6 @@
           <a:lstStyle/>
           <a:p>
             <a:pPr algn="ctr"/>
-            <a:endParaRPr/>
           </a:p>
         </p:txBody>
       </p:sp>
@@ -16207,7 +19220,6 @@
           <a:lstStyle/>
           <a:p>
             <a:pPr algn="ctr"/>
-            <a:endParaRPr/>
           </a:p>
         </p:txBody>
       </p:sp>
@@ -16285,7 +19297,6 @@
           <a:lstStyle/>
           <a:p>
             <a:pPr algn="ctr"/>
-            <a:endParaRPr/>
           </a:p>
         </p:txBody>
       </p:sp>
@@ -16377,12 +19388,15 @@
             </a:r>
           </a:p>
           <a:p>
-            <a:endParaRPr sz="1000">
-              <a:solidFill>
-                <a:srgbClr val="ABB2BF"/>
-              </a:solidFill>
-              <a:latin typeface="Courier New"/>
-            </a:endParaRPr>
+            <a:r>
+              <a:rPr sz="1000">
+                <a:solidFill>
+                  <a:srgbClr val="ABB2BF"/>
+                </a:solidFill>
+                <a:latin typeface="Courier New"/>
+              </a:rPr>
+              <a:t/>
+            </a:r>
           </a:p>
           <a:p>
             <a:r>
@@ -16417,7 +19431,7 @@
 </file>
 
 <file path=ppt/slides/slide8.xml><?xml version="1.0" encoding="utf-8"?>
-<p:sld xmlns:a="http://schemas.openxmlformats.org/drawingml/2006/main" xmlns:r="http://schemas.openxmlformats.org/officeDocument/2006/relationships" xmlns:p="http://schemas.openxmlformats.org/presentationml/2006/main">
+<p:sld xmlns:a="http://schemas.openxmlformats.org/drawingml/2006/main" xmlns:p="http://schemas.openxmlformats.org/presentationml/2006/main" xmlns:r="http://schemas.openxmlformats.org/officeDocument/2006/relationships">
   <p:cSld>
     <p:spTree>
       <p:nvGrpSpPr>
@@ -16425,14 +19439,7 @@
         <p:cNvGrpSpPr/>
         <p:nvPr/>
       </p:nvGrpSpPr>
-      <p:grpSpPr>
-        <a:xfrm>
-          <a:off x="0" y="0"/>
-          <a:ext cx="0" cy="0"/>
-          <a:chOff x="0" y="0"/>
-          <a:chExt cx="0" cy="0"/>
-        </a:xfrm>
-      </p:grpSpPr>
+      <p:grpSpPr/>
       <p:sp>
         <p:nvSpPr>
           <p:cNvPr id="2" name="Rectangle 1"/>
@@ -16473,7 +19480,6 @@
           <a:lstStyle/>
           <a:p>
             <a:pPr algn="ctr"/>
-            <a:endParaRPr/>
           </a:p>
         </p:txBody>
       </p:sp>
@@ -16517,7 +19523,6 @@
           <a:lstStyle/>
           <a:p>
             <a:pPr algn="ctr"/>
-            <a:endParaRPr/>
           </a:p>
         </p:txBody>
       </p:sp>
@@ -16629,7 +19634,6 @@
           <a:lstStyle/>
           <a:p>
             <a:pPr algn="ctr"/>
-            <a:endParaRPr/>
           </a:p>
         </p:txBody>
       </p:sp>
@@ -16707,7 +19711,6 @@
           <a:lstStyle/>
           <a:p>
             <a:pPr algn="ctr"/>
-            <a:endParaRPr/>
           </a:p>
         </p:txBody>
       </p:sp>
@@ -16755,12 +19758,15 @@
             </a:r>
           </a:p>
           <a:p>
-            <a:endParaRPr sz="1000">
-              <a:solidFill>
-                <a:srgbClr val="ABB2BF"/>
-              </a:solidFill>
-              <a:latin typeface="Courier New"/>
-            </a:endParaRPr>
+            <a:r>
+              <a:rPr sz="1000">
+                <a:solidFill>
+                  <a:srgbClr val="ABB2BF"/>
+                </a:solidFill>
+                <a:latin typeface="Courier New"/>
+              </a:rPr>
+              <a:t/>
+            </a:r>
           </a:p>
           <a:p>
             <a:r>
@@ -16848,7 +19854,6 @@
           <a:lstStyle/>
           <a:p>
             <a:pPr algn="ctr"/>
-            <a:endParaRPr/>
           </a:p>
         </p:txBody>
       </p:sp>
@@ -17039,7 +20044,6 @@
           <a:lstStyle/>
           <a:p>
             <a:pPr algn="ctr"/>
-            <a:endParaRPr/>
           </a:p>
         </p:txBody>
       </p:sp>
@@ -17219,7 +20223,6 @@
           <a:lstStyle/>
           <a:p>
             <a:pPr algn="ctr"/>
-            <a:endParaRPr/>
           </a:p>
         </p:txBody>
       </p:sp>
@@ -17399,7 +20402,6 @@
           <a:lstStyle/>
           <a:p>
             <a:pPr algn="ctr"/>
-            <a:endParaRPr/>
           </a:p>
         </p:txBody>
       </p:sp>
@@ -17529,7 +20531,7 @@
           <a:p>
             <a:pPr algn="l"/>
             <a:r>
-              <a:rPr sz="1100" b="0" dirty="0">
+              <a:rPr sz="1100" b="0">
                 <a:solidFill>
                   <a:srgbClr val="444444"/>
                 </a:solidFill>
@@ -17579,7 +20581,6 @@
           <a:lstStyle/>
           <a:p>
             <a:pPr algn="ctr"/>
-            <a:endParaRPr/>
           </a:p>
         </p:txBody>
       </p:sp>
@@ -17709,7 +20710,7 @@
           <a:p>
             <a:pPr algn="l"/>
             <a:r>
-              <a:rPr sz="1100" b="0" dirty="0">
+              <a:rPr sz="1100" b="0">
                 <a:solidFill>
                   <a:srgbClr val="444444"/>
                 </a:solidFill>
@@ -17759,7 +20760,6 @@
           <a:lstStyle/>
           <a:p>
             <a:pPr algn="ctr"/>
-            <a:endParaRPr/>
           </a:p>
         </p:txBody>
       </p:sp>
@@ -17889,7 +20889,7 @@
           <a:p>
             <a:pPr algn="l"/>
             <a:r>
-              <a:rPr sz="1100" b="0" dirty="0">
+              <a:rPr sz="1100" b="0">
                 <a:solidFill>
                   <a:srgbClr val="444444"/>
                 </a:solidFill>
@@ -17908,7 +20908,7 @@
 </file>
 
 <file path=ppt/slides/slide9.xml><?xml version="1.0" encoding="utf-8"?>
-<p:sld xmlns:a="http://schemas.openxmlformats.org/drawingml/2006/main" xmlns:r="http://schemas.openxmlformats.org/officeDocument/2006/relationships" xmlns:p="http://schemas.openxmlformats.org/presentationml/2006/main">
+<p:sld xmlns:a="http://schemas.openxmlformats.org/drawingml/2006/main" xmlns:p="http://schemas.openxmlformats.org/presentationml/2006/main" xmlns:r="http://schemas.openxmlformats.org/officeDocument/2006/relationships">
   <p:cSld>
     <p:spTree>
       <p:nvGrpSpPr>
@@ -17916,14 +20916,7 @@
         <p:cNvGrpSpPr/>
         <p:nvPr/>
       </p:nvGrpSpPr>
-      <p:grpSpPr>
-        <a:xfrm>
-          <a:off x="0" y="0"/>
-          <a:ext cx="0" cy="0"/>
-          <a:chOff x="0" y="0"/>
-          <a:chExt cx="0" cy="0"/>
-        </a:xfrm>
-      </p:grpSpPr>
+      <p:grpSpPr/>
       <p:sp>
         <p:nvSpPr>
           <p:cNvPr id="2" name="Rectangle 1"/>
@@ -17964,7 +20957,6 @@
           <a:lstStyle/>
           <a:p>
             <a:pPr algn="ctr"/>
-            <a:endParaRPr/>
           </a:p>
         </p:txBody>
       </p:sp>
@@ -18008,7 +21000,6 @@
           <a:lstStyle/>
           <a:p>
             <a:pPr algn="ctr"/>
-            <a:endParaRPr/>
           </a:p>
         </p:txBody>
       </p:sp>
@@ -18089,7 +21080,7 @@
         <p:spPr>
           <a:xfrm>
             <a:off x="274320" y="1463040"/>
-            <a:ext cx="5669280" cy="5129146"/>
+            <a:ext cx="5669280" cy="4297680"/>
           </a:xfrm>
           <a:prstGeom prst="rect">
             <a:avLst/>
@@ -18120,7 +21111,42 @@
           <a:lstStyle/>
           <a:p>
             <a:pPr algn="ctr"/>
-            <a:endParaRPr/>
+          </a:p>
+        </p:txBody>
+      </p:sp>
+      <p:sp>
+        <p:nvSpPr>
+          <p:cNvPr id="7" name="TextBox 6"/>
+          <p:cNvSpPr txBox="1"/>
+          <p:nvPr/>
+        </p:nvSpPr>
+        <p:spPr>
+          <a:xfrm>
+            <a:off x="457200" y="2560320"/>
+            <a:ext cx="5303520" cy="1828800"/>
+          </a:xfrm>
+          <a:prstGeom prst="rect">
+            <a:avLst/>
+          </a:prstGeom>
+          <a:noFill/>
+        </p:spPr>
+        <p:txBody>
+          <a:bodyPr wrap="square">
+            <a:spAutoFit/>
+          </a:bodyPr>
+          <a:lstStyle/>
+          <a:p>
+            <a:pPr algn="ctr"/>
+            <a:r>
+              <a:rPr sz="1400" b="0">
+                <a:solidFill>
+                  <a:srgbClr val="8090A0"/>
+                </a:solidFill>
+              </a:rPr>
+              <a:t>🖥  Screenshot placeholder
+Streamlit UI at http://localhost:8501
+Replace with actual screenshot</a:t>
+            </a:r>
           </a:p>
         </p:txBody>
       </p:sp>
@@ -18164,7 +21190,6 @@
           <a:lstStyle/>
           <a:p>
             <a:pPr algn="ctr"/>
-            <a:endParaRPr/>
           </a:p>
         </p:txBody>
       </p:sp>
@@ -18242,7 +21267,6 @@
           <a:lstStyle/>
           <a:p>
             <a:pPr algn="ctr"/>
-            <a:endParaRPr/>
           </a:p>
         </p:txBody>
       </p:sp>
@@ -18320,7 +21344,6 @@
           <a:lstStyle/>
           <a:p>
             <a:pPr algn="ctr"/>
-            <a:endParaRPr/>
           </a:p>
         </p:txBody>
       </p:sp>
@@ -18399,7 +21422,6 @@
           <a:lstStyle/>
           <a:p>
             <a:pPr algn="ctr"/>
-            <a:endParaRPr/>
           </a:p>
         </p:txBody>
       </p:sp>
@@ -18477,7 +21499,6 @@
           <a:lstStyle/>
           <a:p>
             <a:pPr algn="ctr"/>
-            <a:endParaRPr/>
           </a:p>
         </p:txBody>
       </p:sp>
@@ -18555,7 +21576,6 @@
           <a:lstStyle/>
           <a:p>
             <a:pPr algn="ctr"/>
-            <a:endParaRPr/>
           </a:p>
         </p:txBody>
       </p:sp>
@@ -18635,7 +21655,6 @@
           <a:lstStyle/>
           <a:p>
             <a:pPr algn="ctr"/>
-            <a:endParaRPr/>
           </a:p>
         </p:txBody>
       </p:sp>
@@ -18675,36 +21694,40 @@
           </a:p>
         </p:txBody>
       </p:sp>
-      <p:pic>
-        <p:nvPicPr>
-          <p:cNvPr id="23" name="Picture 22">
-            <a:extLst>
-              <a:ext uri="{FF2B5EF4-FFF2-40B4-BE49-F238E27FC236}">
-                <a16:creationId xmlns:a16="http://schemas.microsoft.com/office/drawing/2014/main" id="{2BAB1B0F-D083-A740-A410-DB2D185EC9F6}"/>
-              </a:ext>
-            </a:extLst>
-          </p:cNvPr>
-          <p:cNvPicPr>
-            <a:picLocks noChangeAspect="1"/>
-          </p:cNvPicPr>
-          <p:nvPr/>
-        </p:nvPicPr>
-        <p:blipFill>
-          <a:blip r:embed="rId2"/>
-          <a:stretch>
-            <a:fillRect/>
-          </a:stretch>
-        </p:blipFill>
-        <p:spPr>
-          <a:xfrm>
-            <a:off x="768586" y="1691640"/>
-            <a:ext cx="4680747" cy="4743858"/>
-          </a:xfrm>
-          <a:prstGeom prst="rect">
-            <a:avLst/>
-          </a:prstGeom>
-        </p:spPr>
-      </p:pic>
+      <p:sp>
+        <p:nvSpPr>
+          <p:cNvPr id="22" name="TextBox 21"/>
+          <p:cNvSpPr txBox="1"/>
+          <p:nvPr/>
+        </p:nvSpPr>
+        <p:spPr>
+          <a:xfrm>
+            <a:off x="274320" y="5897880"/>
+            <a:ext cx="11612880" cy="274320"/>
+          </a:xfrm>
+          <a:prstGeom prst="rect">
+            <a:avLst/>
+          </a:prstGeom>
+          <a:noFill/>
+        </p:spPr>
+        <p:txBody>
+          <a:bodyPr wrap="square">
+            <a:spAutoFit/>
+          </a:bodyPr>
+          <a:lstStyle/>
+          <a:p>
+            <a:pPr algn="ctr"/>
+            <a:r>
+              <a:rPr sz="1100" b="0">
+                <a:solidFill>
+                  <a:srgbClr val="444444"/>
+                </a:solidFill>
+              </a:rPr>
+              <a:t>UI features: session UUID · spinner · error banner · message history</a:t>
+            </a:r>
+          </a:p>
+        </p:txBody>
+      </p:sp>
     </p:spTree>
   </p:cSld>
   <p:clrMapOvr>
